--- a/modulos/08-qualidade-observabilidade/sessao-ao-vivo-qualidade-observabilidade.pptx
+++ b/modulos/08-qualidade-observabilidade/sessao-ao-vivo-qualidade-observabilidade.pptx
@@ -2,27 +2,27 @@
 <file path=ppt/presentation.xml><?xml version="1.0" encoding="utf-8"?>
 <p:presentation xmlns:p="http://schemas.openxmlformats.org/presentationml/2006/main">
   <p:sldMasterIdLst>
-    <p:sldMasterId xmlns:r="http://schemas.openxmlformats.org/officeDocument/2006/relationships" id="2147483648" r:id="R914c0e1556224d4d"/>
+    <p:sldMasterId xmlns:r="http://schemas.openxmlformats.org/officeDocument/2006/relationships" id="2147483648" r:id="R13e58cba934b4efa"/>
   </p:sldMasterIdLst>
   <p:notesMasterIdLst>
-    <p:notesMasterId xmlns:r="http://schemas.openxmlformats.org/officeDocument/2006/relationships" r:id="Rf55c982a97d9428c"/>
+    <p:notesMasterId xmlns:r="http://schemas.openxmlformats.org/officeDocument/2006/relationships" r:id="Ra04d7a4d44724128"/>
   </p:notesMasterIdLst>
   <p:sldIdLst>
-    <p:sldId xmlns:r="http://schemas.openxmlformats.org/officeDocument/2006/relationships" id="256" r:id="R2d82df8bf87143e9"/>
-    <p:sldId xmlns:r="http://schemas.openxmlformats.org/officeDocument/2006/relationships" id="257" r:id="R6f58abafabda4b7d"/>
-    <p:sldId xmlns:r="http://schemas.openxmlformats.org/officeDocument/2006/relationships" id="258" r:id="R250e67c1119c4979"/>
-    <p:sldId xmlns:r="http://schemas.openxmlformats.org/officeDocument/2006/relationships" id="259" r:id="Rc9625e6ebb0240a9"/>
-    <p:sldId xmlns:r="http://schemas.openxmlformats.org/officeDocument/2006/relationships" id="260" r:id="R4092ccf9adfe436b"/>
-    <p:sldId xmlns:r="http://schemas.openxmlformats.org/officeDocument/2006/relationships" id="261" r:id="R0bdcde402e004002"/>
-    <p:sldId xmlns:r="http://schemas.openxmlformats.org/officeDocument/2006/relationships" id="262" r:id="R5aa9b9a780c64fe2"/>
-    <p:sldId xmlns:r="http://schemas.openxmlformats.org/officeDocument/2006/relationships" id="263" r:id="R4e393cbf88144e69"/>
-    <p:sldId xmlns:r="http://schemas.openxmlformats.org/officeDocument/2006/relationships" id="264" r:id="R860b67b442bb4be3"/>
-    <p:sldId xmlns:r="http://schemas.openxmlformats.org/officeDocument/2006/relationships" id="265" r:id="R159ab7892d434e5d"/>
-    <p:sldId xmlns:r="http://schemas.openxmlformats.org/officeDocument/2006/relationships" id="266" r:id="R1b4cb17280e94264"/>
-    <p:sldId xmlns:r="http://schemas.openxmlformats.org/officeDocument/2006/relationships" id="267" r:id="R8de37b46ccbe4686"/>
-    <p:sldId xmlns:r="http://schemas.openxmlformats.org/officeDocument/2006/relationships" id="268" r:id="R89b114bebb7346a3"/>
-    <p:sldId xmlns:r="http://schemas.openxmlformats.org/officeDocument/2006/relationships" id="269" r:id="R23a63886e5194154"/>
-    <p:sldId xmlns:r="http://schemas.openxmlformats.org/officeDocument/2006/relationships" id="270" r:id="R66f96ddc9e694fb6"/>
+    <p:sldId xmlns:r="http://schemas.openxmlformats.org/officeDocument/2006/relationships" id="256" r:id="Rb543367f8eee41c4"/>
+    <p:sldId xmlns:r="http://schemas.openxmlformats.org/officeDocument/2006/relationships" id="257" r:id="R2160cd683eae4467"/>
+    <p:sldId xmlns:r="http://schemas.openxmlformats.org/officeDocument/2006/relationships" id="258" r:id="Rfcce799420ca4adf"/>
+    <p:sldId xmlns:r="http://schemas.openxmlformats.org/officeDocument/2006/relationships" id="259" r:id="R07a8fee6761a4c4e"/>
+    <p:sldId xmlns:r="http://schemas.openxmlformats.org/officeDocument/2006/relationships" id="260" r:id="Re131a444e9064121"/>
+    <p:sldId xmlns:r="http://schemas.openxmlformats.org/officeDocument/2006/relationships" id="261" r:id="R538df99d525d4c1b"/>
+    <p:sldId xmlns:r="http://schemas.openxmlformats.org/officeDocument/2006/relationships" id="262" r:id="R9b774a684d0d4cea"/>
+    <p:sldId xmlns:r="http://schemas.openxmlformats.org/officeDocument/2006/relationships" id="263" r:id="Rcc83bdede9c24376"/>
+    <p:sldId xmlns:r="http://schemas.openxmlformats.org/officeDocument/2006/relationships" id="264" r:id="R708ecede04a44414"/>
+    <p:sldId xmlns:r="http://schemas.openxmlformats.org/officeDocument/2006/relationships" id="265" r:id="Rc696bbd9ca8e4115"/>
+    <p:sldId xmlns:r="http://schemas.openxmlformats.org/officeDocument/2006/relationships" id="266" r:id="Rc04161fed4b24ec1"/>
+    <p:sldId xmlns:r="http://schemas.openxmlformats.org/officeDocument/2006/relationships" id="267" r:id="Rff0b46bdd35d4abf"/>
+    <p:sldId xmlns:r="http://schemas.openxmlformats.org/officeDocument/2006/relationships" id="268" r:id="R686acc73353a46e7"/>
+    <p:sldId xmlns:r="http://schemas.openxmlformats.org/officeDocument/2006/relationships" id="269" r:id="Ra82321212a594706"/>
+    <p:sldId xmlns:r="http://schemas.openxmlformats.org/officeDocument/2006/relationships" id="270" r:id="Rc0ccc75519724780"/>
   </p:sldIdLst>
   <p:sldSz cx="12192000" cy="6858000"/>
   <p:notesSz cx="6858000" cy="9144000"/>
@@ -1493,7 +1493,7 @@
   </p:cSld>
   <p:clrMap bg1="lt1" tx1="dk1" bg2="lt2" tx2="dk2" accent1="accent1" accent2="accent2" accent3="accent3" accent4="accent4" accent5="accent5" accent6="accent6" hlink="hlink" folHlink="folHlink"/>
   <p:sldLayoutIdLst>
-    <p:sldLayoutId xmlns:r="http://schemas.openxmlformats.org/officeDocument/2006/relationships" id="2147483649" r:id="R8e4e981718a94d1d"/>
+    <p:sldLayoutId xmlns:r="http://schemas.openxmlformats.org/officeDocument/2006/relationships" id="2147483649" r:id="R8ee466dd599b4da8"/>
   </p:sldLayoutIdLst>
   <p:txStyles>
     <p:titleStyle>
@@ -1781,7 +1781,7 @@
     <p:bg>
       <p:bgPr>
         <a:solidFill xmlns:a="http://schemas.openxmlformats.org/drawingml/2006/main">
-          <a:srgbClr val="0E1B3E"/>
+          <a:srgbClr val="070F26"/>
         </a:solidFill>
       </p:bgPr>
     </p:bg>
@@ -1799,7 +1799,7 @@
           <p:cNvPr id="1" name="">
             <a:extLst xmlns:a="http://schemas.openxmlformats.org/drawingml/2006/main">
               <a:ext uri="{FF2B5EF4-FFF2-40B4-BE49-F238E27FC236}">
-                <a16:creationId xmlns:a16="http://schemas.microsoft.com/office/drawing/2014/main" id="{022A701A-7CDB-4EA8-A970-08B2E5CA7EA2}"/>
+                <a16:creationId xmlns:a16="http://schemas.microsoft.com/office/drawing/2014/main" id="{076D6A8B-6A1D-4F30-BEF8-8808A37F896E}"/>
               </a:ext>
             </a:extLst>
           </p:cNvPr>
@@ -1817,7 +1817,7 @@
             <a:avLst/>
           </a:prstGeom>
           <a:solidFill xmlns:a="http://schemas.openxmlformats.org/drawingml/2006/main">
-            <a:srgbClr val="0E1B3E"/>
+            <a:srgbClr val="070F26"/>
           </a:solidFill>
           <a:ln xmlns:a="http://schemas.openxmlformats.org/drawingml/2006/main" w="0">
             <a:solidFill>
@@ -1838,7 +1838,7 @@
           <p:nvPr/>
         </p:nvPicPr>
         <p:blipFill>
-          <a:blip xmlns:r="http://schemas.openxmlformats.org/officeDocument/2006/relationships" xmlns:a="http://schemas.openxmlformats.org/drawingml/2006/main" r:embed="Rdaa9e11de95c40de"/>
+          <a:blip xmlns:r="http://schemas.openxmlformats.org/officeDocument/2006/relationships" xmlns:a="http://schemas.openxmlformats.org/drawingml/2006/main" r:embed="R7acfbf1ca3534c72"/>
           <a:stretch xmlns:a="http://schemas.openxmlformats.org/drawingml/2006/main"/>
         </p:blipFill>
         <p:spPr>
@@ -1856,7 +1856,7 @@
           <p:cNvPr id="3" name="">
             <a:extLst xmlns:a="http://schemas.openxmlformats.org/drawingml/2006/main">
               <a:ext uri="{FF2B5EF4-FFF2-40B4-BE49-F238E27FC236}">
-                <a16:creationId xmlns:a16="http://schemas.microsoft.com/office/drawing/2014/main" id="{00B0BBE6-4A84-4A8B-B3CF-BADE7AF2B22F}"/>
+                <a16:creationId xmlns:a16="http://schemas.microsoft.com/office/drawing/2014/main" id="{E0FC2198-A410-40C5-A0A3-1056C55E4192}"/>
               </a:ext>
             </a:extLst>
           </p:cNvPr>
@@ -1914,7 +1914,7 @@
           <p:cNvPr id="4" name="">
             <a:extLst xmlns:a="http://schemas.openxmlformats.org/drawingml/2006/main">
               <a:ext uri="{FF2B5EF4-FFF2-40B4-BE49-F238E27FC236}">
-                <a16:creationId xmlns:a16="http://schemas.microsoft.com/office/drawing/2014/main" id="{C4577C14-C019-4330-A50F-8F3185484707}"/>
+                <a16:creationId xmlns:a16="http://schemas.microsoft.com/office/drawing/2014/main" id="{7F2EFA6E-070B-49D5-B7EF-B04580B47235}"/>
               </a:ext>
             </a:extLst>
           </p:cNvPr>
@@ -1972,7 +1972,7 @@
           <p:cNvPr id="5" name="">
             <a:extLst xmlns:a="http://schemas.openxmlformats.org/drawingml/2006/main">
               <a:ext uri="{FF2B5EF4-FFF2-40B4-BE49-F238E27FC236}">
-                <a16:creationId xmlns:a16="http://schemas.microsoft.com/office/drawing/2014/main" id="{272CC1BD-3784-4D6A-BB6F-83641A1313B3}"/>
+                <a16:creationId xmlns:a16="http://schemas.microsoft.com/office/drawing/2014/main" id="{6EB51CAD-380C-4678-9154-17C47C93E5F9}"/>
               </a:ext>
             </a:extLst>
           </p:cNvPr>
@@ -2034,7 +2034,7 @@
           <p:nvPr/>
         </p:nvPicPr>
         <p:blipFill>
-          <a:blip xmlns:r="http://schemas.openxmlformats.org/officeDocument/2006/relationships" xmlns:a="http://schemas.openxmlformats.org/drawingml/2006/main" r:embed="R3706f619dda84622"/>
+          <a:blip xmlns:r="http://schemas.openxmlformats.org/officeDocument/2006/relationships" xmlns:a="http://schemas.openxmlformats.org/drawingml/2006/main" r:embed="Ra1924539961b4a6d"/>
           <a:stretch xmlns:a="http://schemas.openxmlformats.org/drawingml/2006/main"/>
         </p:blipFill>
         <p:spPr>
@@ -2052,7 +2052,7 @@
           <p:cNvPr id="7" name="">
             <a:extLst xmlns:a="http://schemas.openxmlformats.org/drawingml/2006/main">
               <a:ext uri="{FF2B5EF4-FFF2-40B4-BE49-F238E27FC236}">
-                <a16:creationId xmlns:a16="http://schemas.microsoft.com/office/drawing/2014/main" id="{183CD724-CD68-4AB6-BA2A-2190CB37596F}"/>
+                <a16:creationId xmlns:a16="http://schemas.microsoft.com/office/drawing/2014/main" id="{5F9F8F75-57AA-4FE1-B24D-577E9A355D8D}"/>
               </a:ext>
             </a:extLst>
           </p:cNvPr>
@@ -2110,7 +2110,7 @@
           <p:cNvPr id="8" name="">
             <a:extLst xmlns:a="http://schemas.openxmlformats.org/drawingml/2006/main">
               <a:ext uri="{FF2B5EF4-FFF2-40B4-BE49-F238E27FC236}">
-                <a16:creationId xmlns:a16="http://schemas.microsoft.com/office/drawing/2014/main" id="{7B01BAC3-D540-490E-8F7B-1ECD26840690}"/>
+                <a16:creationId xmlns:a16="http://schemas.microsoft.com/office/drawing/2014/main" id="{60F48538-CB2D-4F04-A686-89AA1A5FF613}"/>
               </a:ext>
             </a:extLst>
           </p:cNvPr>
@@ -2168,7 +2168,7 @@
           <p:cNvPr id="9" name="">
             <a:extLst xmlns:a="http://schemas.openxmlformats.org/drawingml/2006/main">
               <a:ext uri="{FF2B5EF4-FFF2-40B4-BE49-F238E27FC236}">
-                <a16:creationId xmlns:a16="http://schemas.microsoft.com/office/drawing/2014/main" id="{FB367AFD-D75C-4D0E-AB33-DB56D27A8C70}"/>
+                <a16:creationId xmlns:a16="http://schemas.microsoft.com/office/drawing/2014/main" id="{E00DDBBA-EB5C-4ABA-9D2F-3AD25E042D81}"/>
               </a:ext>
             </a:extLst>
           </p:cNvPr>
@@ -2226,7 +2226,7 @@
           <p:cNvPr id="10" name="">
             <a:extLst xmlns:a="http://schemas.openxmlformats.org/drawingml/2006/main">
               <a:ext uri="{FF2B5EF4-FFF2-40B4-BE49-F238E27FC236}">
-                <a16:creationId xmlns:a16="http://schemas.microsoft.com/office/drawing/2014/main" id="{A4BA6BEB-78CA-4FCC-BDEB-B1DBA69039CC}"/>
+                <a16:creationId xmlns:a16="http://schemas.microsoft.com/office/drawing/2014/main" id="{C78A8060-4369-4CE1-9D77-6B258E52F53D}"/>
               </a:ext>
             </a:extLst>
           </p:cNvPr>
@@ -2261,7 +2261,7 @@
           <p:cNvPr id="11" name="">
             <a:extLst xmlns:a="http://schemas.openxmlformats.org/drawingml/2006/main">
               <a:ext uri="{FF2B5EF4-FFF2-40B4-BE49-F238E27FC236}">
-                <a16:creationId xmlns:a16="http://schemas.microsoft.com/office/drawing/2014/main" id="{DE93D5EE-F81A-4956-937E-695DE43793E7}"/>
+                <a16:creationId xmlns:a16="http://schemas.microsoft.com/office/drawing/2014/main" id="{44BFD775-2169-4855-A4B3-2A3E2AAAD595}"/>
               </a:ext>
             </a:extLst>
           </p:cNvPr>
@@ -2317,7 +2317,7 @@
     </p:spTree>
     <p:extLst>
       <p:ext uri="{BB962C8B-B14F-4D97-AF65-F5344CB8AC3E}">
-        <p14:creationId xmlns:p14="http://schemas.microsoft.com/office/powerpoint/2010/main" val="1522579110"/>
+        <p14:creationId xmlns:p14="http://schemas.microsoft.com/office/powerpoint/2010/main" val="1523616625"/>
       </p:ext>
     </p:extLst>
   </p:cSld>
@@ -2348,7 +2348,7 @@
           <p:cNvPr id="1" name="">
             <a:extLst xmlns:a="http://schemas.openxmlformats.org/drawingml/2006/main">
               <a:ext uri="{FF2B5EF4-FFF2-40B4-BE49-F238E27FC236}">
-                <a16:creationId xmlns:a16="http://schemas.microsoft.com/office/drawing/2014/main" id="{A09D53C3-F5AF-4BBF-9029-B0AF0CB347E8}"/>
+                <a16:creationId xmlns:a16="http://schemas.microsoft.com/office/drawing/2014/main" id="{3197A1AC-888D-459F-B884-DABD821726F9}"/>
               </a:ext>
             </a:extLst>
           </p:cNvPr>
@@ -2387,7 +2387,7 @@
           <p:nvPr/>
         </p:nvPicPr>
         <p:blipFill>
-          <a:blip xmlns:r="http://schemas.openxmlformats.org/officeDocument/2006/relationships" xmlns:a="http://schemas.openxmlformats.org/drawingml/2006/main" r:embed="Rb82860b785214447"/>
+          <a:blip xmlns:r="http://schemas.openxmlformats.org/officeDocument/2006/relationships" xmlns:a="http://schemas.openxmlformats.org/drawingml/2006/main" r:embed="Reb41f1a829904649"/>
           <a:stretch xmlns:a="http://schemas.openxmlformats.org/drawingml/2006/main"/>
         </p:blipFill>
         <p:spPr>
@@ -2405,7 +2405,7 @@
           <p:cNvPr id="3" name="">
             <a:extLst xmlns:a="http://schemas.openxmlformats.org/drawingml/2006/main">
               <a:ext uri="{FF2B5EF4-FFF2-40B4-BE49-F238E27FC236}">
-                <a16:creationId xmlns:a16="http://schemas.microsoft.com/office/drawing/2014/main" id="{631C048B-FE54-41BE-8577-DF692A6FF3A6}"/>
+                <a16:creationId xmlns:a16="http://schemas.microsoft.com/office/drawing/2014/main" id="{AF26A0D9-7291-4A98-83B6-6FAC44920969}"/>
               </a:ext>
             </a:extLst>
           </p:cNvPr>
@@ -2443,14 +2443,14 @@
             <a:pPr algn="r">
               <a:defRPr sz="825" b="1">
                 <a:solidFill>
-                  <a:srgbClr val="0E1B3E"/>
+                  <a:srgbClr val="070F26"/>
                 </a:solidFill>
               </a:defRPr>
             </a:pPr>
             <a:r>
               <a:rPr sz="825" b="1">
                 <a:solidFill>
-                  <a:srgbClr val="0E1B3E"/>
+                  <a:srgbClr val="070F26"/>
                 </a:solidFill>
               </a:rPr>
               <a:t>NTT DATA UNIVERSITY</a:t>
@@ -2463,7 +2463,7 @@
           <p:cNvPr id="4" name="">
             <a:extLst xmlns:a="http://schemas.openxmlformats.org/drawingml/2006/main">
               <a:ext uri="{FF2B5EF4-FFF2-40B4-BE49-F238E27FC236}">
-                <a16:creationId xmlns:a16="http://schemas.microsoft.com/office/drawing/2014/main" id="{616FE09B-0851-407C-84C6-7581AF3522A0}"/>
+                <a16:creationId xmlns:a16="http://schemas.microsoft.com/office/drawing/2014/main" id="{C35A3B61-9787-4151-A5C3-567B11BD9048}"/>
               </a:ext>
             </a:extLst>
           </p:cNvPr>
@@ -2521,7 +2521,7 @@
           <p:cNvPr id="5" name="">
             <a:extLst xmlns:a="http://schemas.openxmlformats.org/drawingml/2006/main">
               <a:ext uri="{FF2B5EF4-FFF2-40B4-BE49-F238E27FC236}">
-                <a16:creationId xmlns:a16="http://schemas.microsoft.com/office/drawing/2014/main" id="{E0B358D5-998C-473D-B0EC-746D07776EC5}"/>
+                <a16:creationId xmlns:a16="http://schemas.microsoft.com/office/drawing/2014/main" id="{3FAE2918-48BC-42E3-8587-CCCBA0DC0E51}"/>
               </a:ext>
             </a:extLst>
           </p:cNvPr>
@@ -2579,7 +2579,7 @@
           <p:cNvPr id="6" name="">
             <a:extLst xmlns:a="http://schemas.openxmlformats.org/drawingml/2006/main">
               <a:ext uri="{FF2B5EF4-FFF2-40B4-BE49-F238E27FC236}">
-                <a16:creationId xmlns:a16="http://schemas.microsoft.com/office/drawing/2014/main" id="{72CB3C99-0E96-46C3-AF0E-977D86BAC404}"/>
+                <a16:creationId xmlns:a16="http://schemas.microsoft.com/office/drawing/2014/main" id="{4BC0B497-2AC5-42E4-86F2-4258AE77BAE1}"/>
               </a:ext>
             </a:extLst>
           </p:cNvPr>
@@ -2617,14 +2617,14 @@
             <a:pPr algn="r">
               <a:defRPr sz="675" b="1">
                 <a:solidFill>
-                  <a:srgbClr val="0E1B3E"/>
+                  <a:srgbClr val="070F26"/>
                 </a:solidFill>
               </a:defRPr>
             </a:pPr>
             <a:r>
               <a:rPr sz="675" b="1">
                 <a:solidFill>
-                  <a:srgbClr val="0E1B3E"/>
+                  <a:srgbClr val="070F26"/>
                 </a:solidFill>
               </a:rPr>
               <a:t>NTT DATA UNIVERSITY</a:t>
@@ -2637,7 +2637,7 @@
           <p:cNvPr id="7" name="">
             <a:extLst xmlns:a="http://schemas.openxmlformats.org/drawingml/2006/main">
               <a:ext uri="{FF2B5EF4-FFF2-40B4-BE49-F238E27FC236}">
-                <a16:creationId xmlns:a16="http://schemas.microsoft.com/office/drawing/2014/main" id="{B8EF9540-E5F4-47D8-8C15-7ED1B790B808}"/>
+                <a16:creationId xmlns:a16="http://schemas.microsoft.com/office/drawing/2014/main" id="{8F6E7169-2153-4885-AF01-A3AD91065A7D}"/>
               </a:ext>
             </a:extLst>
           </p:cNvPr>
@@ -2695,7 +2695,7 @@
           <p:cNvPr id="8" name="">
             <a:extLst xmlns:a="http://schemas.openxmlformats.org/drawingml/2006/main">
               <a:ext uri="{FF2B5EF4-FFF2-40B4-BE49-F238E27FC236}">
-                <a16:creationId xmlns:a16="http://schemas.microsoft.com/office/drawing/2014/main" id="{7AD34E69-E542-4F4B-94F2-019C4F90AC18}"/>
+                <a16:creationId xmlns:a16="http://schemas.microsoft.com/office/drawing/2014/main" id="{58EC3F09-CE7D-49A9-A7C0-D438079070E7}"/>
               </a:ext>
             </a:extLst>
           </p:cNvPr>
@@ -2733,14 +2733,14 @@
             <a:pPr algn="l">
               <a:defRPr sz="2400" b="0">
                 <a:solidFill>
-                  <a:srgbClr val="0E1B3E"/>
+                  <a:srgbClr val="070F26"/>
                 </a:solidFill>
               </a:defRPr>
             </a:pPr>
             <a:r>
               <a:rPr sz="2400" b="0">
                 <a:solidFill>
-                  <a:srgbClr val="0E1B3E"/>
+                  <a:srgbClr val="070F26"/>
                 </a:solidFill>
               </a:rPr>
               <a:t>Implementar até que todos os testes passem</a:t>
@@ -2753,7 +2753,7 @@
           <p:cNvPr id="9" name="">
             <a:extLst xmlns:a="http://schemas.openxmlformats.org/drawingml/2006/main">
               <a:ext uri="{FF2B5EF4-FFF2-40B4-BE49-F238E27FC236}">
-                <a16:creationId xmlns:a16="http://schemas.microsoft.com/office/drawing/2014/main" id="{35F25BED-C1F4-401B-BB32-45122EA01371}"/>
+                <a16:creationId xmlns:a16="http://schemas.microsoft.com/office/drawing/2014/main" id="{1CBA1687-DC27-4209-8C02-02E2566B4FF9}"/>
               </a:ext>
             </a:extLst>
           </p:cNvPr>
@@ -2811,7 +2811,7 @@
           <p:cNvPr id="10" name="">
             <a:extLst xmlns:a="http://schemas.openxmlformats.org/drawingml/2006/main">
               <a:ext uri="{FF2B5EF4-FFF2-40B4-BE49-F238E27FC236}">
-                <a16:creationId xmlns:a16="http://schemas.microsoft.com/office/drawing/2014/main" id="{97D2BFD3-C9B8-465E-A9AE-5FE3C0DF9BB4}"/>
+                <a16:creationId xmlns:a16="http://schemas.microsoft.com/office/drawing/2014/main" id="{1C3B3E25-030D-408D-84E1-63D607BB5ED1}"/>
               </a:ext>
             </a:extLst>
           </p:cNvPr>
@@ -2844,7 +2844,7 @@
           <p:cNvPr id="11" name="">
             <a:extLst xmlns:a="http://schemas.openxmlformats.org/drawingml/2006/main">
               <a:ext uri="{FF2B5EF4-FFF2-40B4-BE49-F238E27FC236}">
-                <a16:creationId xmlns:a16="http://schemas.microsoft.com/office/drawing/2014/main" id="{A7869509-9617-4A0E-BA80-5EC29F302A90}"/>
+                <a16:creationId xmlns:a16="http://schemas.microsoft.com/office/drawing/2014/main" id="{EAB9F282-476C-49BE-989B-D7EE60B28AFC}"/>
               </a:ext>
             </a:extLst>
           </p:cNvPr>
@@ -2879,7 +2879,7 @@
           <p:cNvPr id="12" name="">
             <a:extLst xmlns:a="http://schemas.openxmlformats.org/drawingml/2006/main">
               <a:ext uri="{FF2B5EF4-FFF2-40B4-BE49-F238E27FC236}">
-                <a16:creationId xmlns:a16="http://schemas.microsoft.com/office/drawing/2014/main" id="{B35E65B5-2662-4575-A42E-27000388459A}"/>
+                <a16:creationId xmlns:a16="http://schemas.microsoft.com/office/drawing/2014/main" id="{7DC46046-A034-4CA6-89BF-877534CC54CA}"/>
               </a:ext>
             </a:extLst>
           </p:cNvPr>
@@ -2937,7 +2937,7 @@
           <p:cNvPr id="13" name="">
             <a:extLst xmlns:a="http://schemas.openxmlformats.org/drawingml/2006/main">
               <a:ext uri="{FF2B5EF4-FFF2-40B4-BE49-F238E27FC236}">
-                <a16:creationId xmlns:a16="http://schemas.microsoft.com/office/drawing/2014/main" id="{B9058555-8838-44DB-BC12-D644538BBB04}"/>
+                <a16:creationId xmlns:a16="http://schemas.microsoft.com/office/drawing/2014/main" id="{5DAD5BA3-D474-4559-912A-F2DA8023369D}"/>
               </a:ext>
             </a:extLst>
           </p:cNvPr>
@@ -3267,7 +3267,7 @@
           <p:cNvPr id="14" name="">
             <a:extLst xmlns:a="http://schemas.openxmlformats.org/drawingml/2006/main">
               <a:ext uri="{FF2B5EF4-FFF2-40B4-BE49-F238E27FC236}">
-                <a16:creationId xmlns:a16="http://schemas.microsoft.com/office/drawing/2014/main" id="{153A2304-9E68-443B-B119-F3E3598BD2B9}"/>
+                <a16:creationId xmlns:a16="http://schemas.microsoft.com/office/drawing/2014/main" id="{8225120B-937B-4AD2-9146-FA552FEF66E6}"/>
               </a:ext>
             </a:extLst>
           </p:cNvPr>
@@ -3300,7 +3300,7 @@
           <p:cNvPr id="15" name="">
             <a:extLst xmlns:a="http://schemas.openxmlformats.org/drawingml/2006/main">
               <a:ext uri="{FF2B5EF4-FFF2-40B4-BE49-F238E27FC236}">
-                <a16:creationId xmlns:a16="http://schemas.microsoft.com/office/drawing/2014/main" id="{0521A561-F87E-41A1-807A-BB736E155720}"/>
+                <a16:creationId xmlns:a16="http://schemas.microsoft.com/office/drawing/2014/main" id="{6131DDC8-53B4-4E8B-9B00-39B0BEA986A2}"/>
               </a:ext>
             </a:extLst>
           </p:cNvPr>
@@ -3335,7 +3335,7 @@
           <p:cNvPr id="16" name="">
             <a:extLst xmlns:a="http://schemas.openxmlformats.org/drawingml/2006/main">
               <a:ext uri="{FF2B5EF4-FFF2-40B4-BE49-F238E27FC236}">
-                <a16:creationId xmlns:a16="http://schemas.microsoft.com/office/drawing/2014/main" id="{D5331961-0CCD-420C-8EDF-6342E6E091D1}"/>
+                <a16:creationId xmlns:a16="http://schemas.microsoft.com/office/drawing/2014/main" id="{BCF2B1B8-1726-468F-A91D-EEACE9DEC6ED}"/>
               </a:ext>
             </a:extLst>
           </p:cNvPr>
@@ -3393,7 +3393,7 @@
           <p:cNvPr id="17" name="">
             <a:extLst xmlns:a="http://schemas.openxmlformats.org/drawingml/2006/main">
               <a:ext uri="{FF2B5EF4-FFF2-40B4-BE49-F238E27FC236}">
-                <a16:creationId xmlns:a16="http://schemas.microsoft.com/office/drawing/2014/main" id="{E61266ED-1D3B-440F-A4CE-0898B1B10236}"/>
+                <a16:creationId xmlns:a16="http://schemas.microsoft.com/office/drawing/2014/main" id="{7A2368D3-2DFF-4A66-A02E-C3ED4EBC589D}"/>
               </a:ext>
             </a:extLst>
           </p:cNvPr>
@@ -3639,7 +3639,7 @@
     </p:spTree>
     <p:extLst>
       <p:ext uri="{BB962C8B-B14F-4D97-AF65-F5344CB8AC3E}">
-        <p14:creationId xmlns:p14="http://schemas.microsoft.com/office/powerpoint/2010/main" val="1546127632"/>
+        <p14:creationId xmlns:p14="http://schemas.microsoft.com/office/powerpoint/2010/main" val="645640730"/>
       </p:ext>
     </p:extLst>
   </p:cSld>
@@ -3652,7 +3652,7 @@
     <p:bg>
       <p:bgPr>
         <a:solidFill xmlns:a="http://schemas.openxmlformats.org/drawingml/2006/main">
-          <a:srgbClr val="0E1B3E"/>
+          <a:srgbClr val="070F26"/>
         </a:solidFill>
       </p:bgPr>
     </p:bg>
@@ -3670,7 +3670,7 @@
           <p:cNvPr id="1" name="">
             <a:extLst xmlns:a="http://schemas.openxmlformats.org/drawingml/2006/main">
               <a:ext uri="{FF2B5EF4-FFF2-40B4-BE49-F238E27FC236}">
-                <a16:creationId xmlns:a16="http://schemas.microsoft.com/office/drawing/2014/main" id="{5F533243-FA92-4BED-BD0D-C648B2FC63D6}"/>
+                <a16:creationId xmlns:a16="http://schemas.microsoft.com/office/drawing/2014/main" id="{DCC642DA-30D4-4550-93AC-9465E55EAB70}"/>
               </a:ext>
             </a:extLst>
           </p:cNvPr>
@@ -3688,7 +3688,7 @@
             <a:avLst/>
           </a:prstGeom>
           <a:solidFill xmlns:a="http://schemas.openxmlformats.org/drawingml/2006/main">
-            <a:srgbClr val="0E1B3E"/>
+            <a:srgbClr val="070F26"/>
           </a:solidFill>
           <a:ln xmlns:a="http://schemas.openxmlformats.org/drawingml/2006/main" w="0">
             <a:solidFill>
@@ -3709,7 +3709,7 @@
           <p:nvPr/>
         </p:nvPicPr>
         <p:blipFill>
-          <a:blip xmlns:r="http://schemas.openxmlformats.org/officeDocument/2006/relationships" xmlns:a="http://schemas.openxmlformats.org/drawingml/2006/main" r:embed="Re98848e3ffed4127"/>
+          <a:blip xmlns:r="http://schemas.openxmlformats.org/officeDocument/2006/relationships" xmlns:a="http://schemas.openxmlformats.org/drawingml/2006/main" r:embed="R09deeeceaecd4b9f"/>
           <a:stretch xmlns:a="http://schemas.openxmlformats.org/drawingml/2006/main"/>
         </p:blipFill>
         <p:spPr>
@@ -3727,7 +3727,7 @@
           <p:cNvPr id="3" name="">
             <a:extLst xmlns:a="http://schemas.openxmlformats.org/drawingml/2006/main">
               <a:ext uri="{FF2B5EF4-FFF2-40B4-BE49-F238E27FC236}">
-                <a16:creationId xmlns:a16="http://schemas.microsoft.com/office/drawing/2014/main" id="{8AE5A04A-4D06-47A0-94A7-E00AC5D47094}"/>
+                <a16:creationId xmlns:a16="http://schemas.microsoft.com/office/drawing/2014/main" id="{C722B0E4-45E6-4CD0-AC0E-B9D977199DF6}"/>
               </a:ext>
             </a:extLst>
           </p:cNvPr>
@@ -3785,7 +3785,7 @@
           <p:cNvPr id="4" name="">
             <a:extLst xmlns:a="http://schemas.openxmlformats.org/drawingml/2006/main">
               <a:ext uri="{FF2B5EF4-FFF2-40B4-BE49-F238E27FC236}">
-                <a16:creationId xmlns:a16="http://schemas.microsoft.com/office/drawing/2014/main" id="{A82F10D6-2277-4F57-9E9D-A3CF8EA34222}"/>
+                <a16:creationId xmlns:a16="http://schemas.microsoft.com/office/drawing/2014/main" id="{204A997B-A21A-4349-BBAD-AF67252A7B6C}"/>
               </a:ext>
             </a:extLst>
           </p:cNvPr>
@@ -3843,7 +3843,7 @@
           <p:cNvPr id="5" name="">
             <a:extLst xmlns:a="http://schemas.openxmlformats.org/drawingml/2006/main">
               <a:ext uri="{FF2B5EF4-FFF2-40B4-BE49-F238E27FC236}">
-                <a16:creationId xmlns:a16="http://schemas.microsoft.com/office/drawing/2014/main" id="{208AA34C-8EA0-49CA-A070-AA3AE36465E7}"/>
+                <a16:creationId xmlns:a16="http://schemas.microsoft.com/office/drawing/2014/main" id="{368762F6-5B57-4201-8F16-B29031C87ACA}"/>
               </a:ext>
             </a:extLst>
           </p:cNvPr>
@@ -3901,7 +3901,7 @@
           <p:cNvPr id="6" name="">
             <a:extLst xmlns:a="http://schemas.openxmlformats.org/drawingml/2006/main">
               <a:ext uri="{FF2B5EF4-FFF2-40B4-BE49-F238E27FC236}">
-                <a16:creationId xmlns:a16="http://schemas.microsoft.com/office/drawing/2014/main" id="{C3007B5F-DEB1-42F7-8ED6-38EE750A4E6C}"/>
+                <a16:creationId xmlns:a16="http://schemas.microsoft.com/office/drawing/2014/main" id="{8ED592D8-4F44-4EE3-B98D-13A522030928}"/>
               </a:ext>
             </a:extLst>
           </p:cNvPr>
@@ -3963,13 +3963,13 @@
           <p:nvPr/>
         </p:nvPicPr>
         <p:blipFill>
-          <a:blip xmlns:r="http://schemas.openxmlformats.org/officeDocument/2006/relationships" xmlns:a="http://schemas.openxmlformats.org/drawingml/2006/main" r:embed="Rfc585db60f9e4a96"/>
+          <a:blip xmlns:r="http://schemas.openxmlformats.org/officeDocument/2006/relationships" xmlns:a="http://schemas.openxmlformats.org/drawingml/2006/main" r:embed="R6986b57a367f4c49"/>
           <a:stretch xmlns:a="http://schemas.openxmlformats.org/drawingml/2006/main"/>
         </p:blipFill>
         <p:spPr>
           <a:xfrm xmlns:a="http://schemas.openxmlformats.org/drawingml/2006/main">
-            <a:off x="476250" y="1257300"/>
-            <a:ext cx="2667000" cy="4533900"/>
+            <a:off x="0" y="1746250"/>
+            <a:ext cx="2667000" cy="3556000"/>
           </a:xfrm>
           <a:prstGeom xmlns:a="http://schemas.openxmlformats.org/drawingml/2006/main" prst="rect">
             <a:avLst/>
@@ -3981,7 +3981,7 @@
           <p:cNvPr id="8" name="">
             <a:extLst xmlns:a="http://schemas.openxmlformats.org/drawingml/2006/main">
               <a:ext uri="{FF2B5EF4-FFF2-40B4-BE49-F238E27FC236}">
-                <a16:creationId xmlns:a16="http://schemas.microsoft.com/office/drawing/2014/main" id="{E2CCE483-1F95-485E-ADBF-4B4FC5DD142F}"/>
+                <a16:creationId xmlns:a16="http://schemas.microsoft.com/office/drawing/2014/main" id="{305C5D5F-C34B-453C-AB47-D8082AEDCEFF}"/>
               </a:ext>
             </a:extLst>
           </p:cNvPr>
@@ -4039,7 +4039,7 @@
           <p:cNvPr id="9" name="">
             <a:extLst xmlns:a="http://schemas.openxmlformats.org/drawingml/2006/main">
               <a:ext uri="{FF2B5EF4-FFF2-40B4-BE49-F238E27FC236}">
-                <a16:creationId xmlns:a16="http://schemas.microsoft.com/office/drawing/2014/main" id="{9044A982-7B48-47FC-82C2-69F57983936C}"/>
+                <a16:creationId xmlns:a16="http://schemas.microsoft.com/office/drawing/2014/main" id="{D189F323-3E02-4CB0-B52F-0B4304896422}"/>
               </a:ext>
             </a:extLst>
           </p:cNvPr>
@@ -4097,7 +4097,7 @@
           <p:cNvPr id="10" name="">
             <a:extLst xmlns:a="http://schemas.openxmlformats.org/drawingml/2006/main">
               <a:ext uri="{FF2B5EF4-FFF2-40B4-BE49-F238E27FC236}">
-                <a16:creationId xmlns:a16="http://schemas.microsoft.com/office/drawing/2014/main" id="{D5CCBD06-4A75-4805-B934-CB218B492541}"/>
+                <a16:creationId xmlns:a16="http://schemas.microsoft.com/office/drawing/2014/main" id="{D7985A4B-5867-4725-9B25-C88EFD395B54}"/>
               </a:ext>
             </a:extLst>
           </p:cNvPr>
@@ -4153,7 +4153,7 @@
     </p:spTree>
     <p:extLst>
       <p:ext uri="{BB962C8B-B14F-4D97-AF65-F5344CB8AC3E}">
-        <p14:creationId xmlns:p14="http://schemas.microsoft.com/office/powerpoint/2010/main" val="2143369100"/>
+        <p14:creationId xmlns:p14="http://schemas.microsoft.com/office/powerpoint/2010/main" val="232357023"/>
       </p:ext>
     </p:extLst>
   </p:cSld>
@@ -4184,7 +4184,7 @@
           <p:cNvPr id="1" name="">
             <a:extLst xmlns:a="http://schemas.openxmlformats.org/drawingml/2006/main">
               <a:ext uri="{FF2B5EF4-FFF2-40B4-BE49-F238E27FC236}">
-                <a16:creationId xmlns:a16="http://schemas.microsoft.com/office/drawing/2014/main" id="{1862361F-527D-4D1B-937E-0300A77F11DA}"/>
+                <a16:creationId xmlns:a16="http://schemas.microsoft.com/office/drawing/2014/main" id="{615A83FA-5EE8-4530-BE31-1E78ACD69C55}"/>
               </a:ext>
             </a:extLst>
           </p:cNvPr>
@@ -4223,7 +4223,7 @@
           <p:nvPr/>
         </p:nvPicPr>
         <p:blipFill>
-          <a:blip xmlns:r="http://schemas.openxmlformats.org/officeDocument/2006/relationships" xmlns:a="http://schemas.openxmlformats.org/drawingml/2006/main" r:embed="R3161fe887d754bd7"/>
+          <a:blip xmlns:r="http://schemas.openxmlformats.org/officeDocument/2006/relationships" xmlns:a="http://schemas.openxmlformats.org/drawingml/2006/main" r:embed="Rcbf4b116e872485f"/>
           <a:stretch xmlns:a="http://schemas.openxmlformats.org/drawingml/2006/main"/>
         </p:blipFill>
         <p:spPr>
@@ -4241,7 +4241,7 @@
           <p:cNvPr id="3" name="">
             <a:extLst xmlns:a="http://schemas.openxmlformats.org/drawingml/2006/main">
               <a:ext uri="{FF2B5EF4-FFF2-40B4-BE49-F238E27FC236}">
-                <a16:creationId xmlns:a16="http://schemas.microsoft.com/office/drawing/2014/main" id="{AD144841-0A13-4F58-8900-9F2B2708572B}"/>
+                <a16:creationId xmlns:a16="http://schemas.microsoft.com/office/drawing/2014/main" id="{AD3DA4C6-D0F1-48ED-B2E9-6673BF40F5B2}"/>
               </a:ext>
             </a:extLst>
           </p:cNvPr>
@@ -4279,14 +4279,14 @@
             <a:pPr algn="r">
               <a:defRPr sz="825" b="1">
                 <a:solidFill>
-                  <a:srgbClr val="0E1B3E"/>
+                  <a:srgbClr val="070F26"/>
                 </a:solidFill>
               </a:defRPr>
             </a:pPr>
             <a:r>
               <a:rPr sz="825" b="1">
                 <a:solidFill>
-                  <a:srgbClr val="0E1B3E"/>
+                  <a:srgbClr val="070F26"/>
                 </a:solidFill>
               </a:rPr>
               <a:t>NTT DATA UNIVERSITY</a:t>
@@ -4299,7 +4299,7 @@
           <p:cNvPr id="4" name="">
             <a:extLst xmlns:a="http://schemas.openxmlformats.org/drawingml/2006/main">
               <a:ext uri="{FF2B5EF4-FFF2-40B4-BE49-F238E27FC236}">
-                <a16:creationId xmlns:a16="http://schemas.microsoft.com/office/drawing/2014/main" id="{52DF2C57-6F0E-4117-8BD6-A514CC938AA9}"/>
+                <a16:creationId xmlns:a16="http://schemas.microsoft.com/office/drawing/2014/main" id="{A09DE4CC-3493-4AF5-9D8D-B14A1C8FFAB3}"/>
               </a:ext>
             </a:extLst>
           </p:cNvPr>
@@ -4357,7 +4357,7 @@
           <p:cNvPr id="5" name="">
             <a:extLst xmlns:a="http://schemas.openxmlformats.org/drawingml/2006/main">
               <a:ext uri="{FF2B5EF4-FFF2-40B4-BE49-F238E27FC236}">
-                <a16:creationId xmlns:a16="http://schemas.microsoft.com/office/drawing/2014/main" id="{0960D96F-4BFC-4FAA-BC10-5A1B36EC24FF}"/>
+                <a16:creationId xmlns:a16="http://schemas.microsoft.com/office/drawing/2014/main" id="{D6972091-44F9-4468-B4F3-CC3A0830AF9A}"/>
               </a:ext>
             </a:extLst>
           </p:cNvPr>
@@ -4415,7 +4415,7 @@
           <p:cNvPr id="6" name="">
             <a:extLst xmlns:a="http://schemas.openxmlformats.org/drawingml/2006/main">
               <a:ext uri="{FF2B5EF4-FFF2-40B4-BE49-F238E27FC236}">
-                <a16:creationId xmlns:a16="http://schemas.microsoft.com/office/drawing/2014/main" id="{E46825C3-01FB-46F0-9E54-9F0FD27BF08A}"/>
+                <a16:creationId xmlns:a16="http://schemas.microsoft.com/office/drawing/2014/main" id="{8D4A1EE0-C271-4381-A9BB-55F624CFC53E}"/>
               </a:ext>
             </a:extLst>
           </p:cNvPr>
@@ -4453,14 +4453,14 @@
             <a:pPr algn="r">
               <a:defRPr sz="675" b="1">
                 <a:solidFill>
-                  <a:srgbClr val="0E1B3E"/>
+                  <a:srgbClr val="070F26"/>
                 </a:solidFill>
               </a:defRPr>
             </a:pPr>
             <a:r>
               <a:rPr sz="675" b="1">
                 <a:solidFill>
-                  <a:srgbClr val="0E1B3E"/>
+                  <a:srgbClr val="070F26"/>
                 </a:solidFill>
               </a:rPr>
               <a:t>NTT DATA UNIVERSITY</a:t>
@@ -4473,7 +4473,7 @@
           <p:cNvPr id="7" name="">
             <a:extLst xmlns:a="http://schemas.openxmlformats.org/drawingml/2006/main">
               <a:ext uri="{FF2B5EF4-FFF2-40B4-BE49-F238E27FC236}">
-                <a16:creationId xmlns:a16="http://schemas.microsoft.com/office/drawing/2014/main" id="{412EBA16-C9C7-4526-BDA8-97101166BAD7}"/>
+                <a16:creationId xmlns:a16="http://schemas.microsoft.com/office/drawing/2014/main" id="{28893618-9BAA-4A42-A79C-E4C6D5708B72}"/>
               </a:ext>
             </a:extLst>
           </p:cNvPr>
@@ -4531,7 +4531,7 @@
           <p:cNvPr id="8" name="">
             <a:extLst xmlns:a="http://schemas.openxmlformats.org/drawingml/2006/main">
               <a:ext uri="{FF2B5EF4-FFF2-40B4-BE49-F238E27FC236}">
-                <a16:creationId xmlns:a16="http://schemas.microsoft.com/office/drawing/2014/main" id="{A7E3CCD8-503C-4582-8A2F-1E2BCA399BB0}"/>
+                <a16:creationId xmlns:a16="http://schemas.microsoft.com/office/drawing/2014/main" id="{8C35FF5F-DDEF-4F41-AA20-CB20C890D719}"/>
               </a:ext>
             </a:extLst>
           </p:cNvPr>
@@ -4569,14 +4569,14 @@
             <a:pPr algn="l">
               <a:defRPr sz="2400" b="0">
                 <a:solidFill>
-                  <a:srgbClr val="0E1B3E"/>
+                  <a:srgbClr val="070F26"/>
                 </a:solidFill>
               </a:defRPr>
             </a:pPr>
             <a:r>
               <a:rPr sz="2400" b="0">
                 <a:solidFill>
-                  <a:srgbClr val="0E1B3E"/>
+                  <a:srgbClr val="070F26"/>
                 </a:solidFill>
               </a:rPr>
               <a:t>Módulos 1 a 4 — fundação</a:t>
@@ -4589,7 +4589,7 @@
           <p:cNvPr id="9" name="">
             <a:extLst xmlns:a="http://schemas.openxmlformats.org/drawingml/2006/main">
               <a:ext uri="{FF2B5EF4-FFF2-40B4-BE49-F238E27FC236}">
-                <a16:creationId xmlns:a16="http://schemas.microsoft.com/office/drawing/2014/main" id="{CE44068C-3ACD-471C-9958-C23FC5616B33}"/>
+                <a16:creationId xmlns:a16="http://schemas.microsoft.com/office/drawing/2014/main" id="{F09B7B98-3922-4F37-A0EC-4F0A9F196DDE}"/>
               </a:ext>
             </a:extLst>
           </p:cNvPr>
@@ -4647,7 +4647,7 @@
           <p:cNvPr id="10" name="">
             <a:extLst xmlns:a="http://schemas.openxmlformats.org/drawingml/2006/main">
               <a:ext uri="{FF2B5EF4-FFF2-40B4-BE49-F238E27FC236}">
-                <a16:creationId xmlns:a16="http://schemas.microsoft.com/office/drawing/2014/main" id="{FCFAC546-A294-44EC-B36D-5086C98E86A9}"/>
+                <a16:creationId xmlns:a16="http://schemas.microsoft.com/office/drawing/2014/main" id="{273CD0EB-7975-4198-8942-E2FE910B78E5}"/>
               </a:ext>
             </a:extLst>
           </p:cNvPr>
@@ -4680,7 +4680,7 @@
           <p:cNvPr id="11" name="">
             <a:extLst xmlns:a="http://schemas.openxmlformats.org/drawingml/2006/main">
               <a:ext uri="{FF2B5EF4-FFF2-40B4-BE49-F238E27FC236}">
-                <a16:creationId xmlns:a16="http://schemas.microsoft.com/office/drawing/2014/main" id="{0E2FFC0A-1D5A-44CE-820C-280DA4242DCE}"/>
+                <a16:creationId xmlns:a16="http://schemas.microsoft.com/office/drawing/2014/main" id="{88A64640-9187-4C99-9EA1-5562E5088C07}"/>
               </a:ext>
             </a:extLst>
           </p:cNvPr>
@@ -4715,7 +4715,7 @@
           <p:cNvPr id="12" name="">
             <a:extLst xmlns:a="http://schemas.openxmlformats.org/drawingml/2006/main">
               <a:ext uri="{FF2B5EF4-FFF2-40B4-BE49-F238E27FC236}">
-                <a16:creationId xmlns:a16="http://schemas.microsoft.com/office/drawing/2014/main" id="{FA703DB3-9A85-446D-9C25-AF2A7DD31B7D}"/>
+                <a16:creationId xmlns:a16="http://schemas.microsoft.com/office/drawing/2014/main" id="{39229785-68F1-4AFD-A2DC-B280866D3E49}"/>
               </a:ext>
             </a:extLst>
           </p:cNvPr>
@@ -4773,7 +4773,7 @@
           <p:cNvPr id="13" name="">
             <a:extLst xmlns:a="http://schemas.openxmlformats.org/drawingml/2006/main">
               <a:ext uri="{FF2B5EF4-FFF2-40B4-BE49-F238E27FC236}">
-                <a16:creationId xmlns:a16="http://schemas.microsoft.com/office/drawing/2014/main" id="{8F5A0C76-0823-47C2-9B01-91A8E85F0D3B}"/>
+                <a16:creationId xmlns:a16="http://schemas.microsoft.com/office/drawing/2014/main" id="{494E0698-ED3E-4F77-8D7D-B86B9C0A5C5F}"/>
               </a:ext>
             </a:extLst>
           </p:cNvPr>
@@ -4848,7 +4848,7 @@
           <p:cNvPr id="14" name="">
             <a:extLst xmlns:a="http://schemas.openxmlformats.org/drawingml/2006/main">
               <a:ext uri="{FF2B5EF4-FFF2-40B4-BE49-F238E27FC236}">
-                <a16:creationId xmlns:a16="http://schemas.microsoft.com/office/drawing/2014/main" id="{ED89E94A-4FF2-473A-90F8-72EFB6EB0F75}"/>
+                <a16:creationId xmlns:a16="http://schemas.microsoft.com/office/drawing/2014/main" id="{B8314D8C-0178-48AF-89FF-9187A00B4CF4}"/>
               </a:ext>
             </a:extLst>
           </p:cNvPr>
@@ -4881,7 +4881,7 @@
           <p:cNvPr id="15" name="">
             <a:extLst xmlns:a="http://schemas.openxmlformats.org/drawingml/2006/main">
               <a:ext uri="{FF2B5EF4-FFF2-40B4-BE49-F238E27FC236}">
-                <a16:creationId xmlns:a16="http://schemas.microsoft.com/office/drawing/2014/main" id="{707BAD99-12BB-4021-B9DD-220287E5CEDA}"/>
+                <a16:creationId xmlns:a16="http://schemas.microsoft.com/office/drawing/2014/main" id="{64D2FD7F-0EBC-45B6-BCDF-A67F7705B51B}"/>
               </a:ext>
             </a:extLst>
           </p:cNvPr>
@@ -4916,7 +4916,7 @@
           <p:cNvPr id="16" name="">
             <a:extLst xmlns:a="http://schemas.openxmlformats.org/drawingml/2006/main">
               <a:ext uri="{FF2B5EF4-FFF2-40B4-BE49-F238E27FC236}">
-                <a16:creationId xmlns:a16="http://schemas.microsoft.com/office/drawing/2014/main" id="{9E3E51AC-5BD7-45CE-9A94-3CB7CE45F1AD}"/>
+                <a16:creationId xmlns:a16="http://schemas.microsoft.com/office/drawing/2014/main" id="{6772093E-35E0-443C-83A8-486BDA6ACAE1}"/>
               </a:ext>
             </a:extLst>
           </p:cNvPr>
@@ -4974,7 +4974,7 @@
           <p:cNvPr id="17" name="">
             <a:extLst xmlns:a="http://schemas.openxmlformats.org/drawingml/2006/main">
               <a:ext uri="{FF2B5EF4-FFF2-40B4-BE49-F238E27FC236}">
-                <a16:creationId xmlns:a16="http://schemas.microsoft.com/office/drawing/2014/main" id="{F567571C-CD08-4C0B-BE89-BCF69E4B5D67}"/>
+                <a16:creationId xmlns:a16="http://schemas.microsoft.com/office/drawing/2014/main" id="{70202945-8045-4473-9014-50914584EFED}"/>
               </a:ext>
             </a:extLst>
           </p:cNvPr>
@@ -5049,7 +5049,7 @@
           <p:cNvPr id="18" name="">
             <a:extLst xmlns:a="http://schemas.openxmlformats.org/drawingml/2006/main">
               <a:ext uri="{FF2B5EF4-FFF2-40B4-BE49-F238E27FC236}">
-                <a16:creationId xmlns:a16="http://schemas.microsoft.com/office/drawing/2014/main" id="{A7B26E75-5D16-43CF-9027-50CF5044B045}"/>
+                <a16:creationId xmlns:a16="http://schemas.microsoft.com/office/drawing/2014/main" id="{41067213-CB2A-4C1F-B7D3-797010E67138}"/>
               </a:ext>
             </a:extLst>
           </p:cNvPr>
@@ -5082,7 +5082,7 @@
           <p:cNvPr id="19" name="">
             <a:extLst xmlns:a="http://schemas.openxmlformats.org/drawingml/2006/main">
               <a:ext uri="{FF2B5EF4-FFF2-40B4-BE49-F238E27FC236}">
-                <a16:creationId xmlns:a16="http://schemas.microsoft.com/office/drawing/2014/main" id="{DFBE7C75-90C1-4459-881E-23D27942BED9}"/>
+                <a16:creationId xmlns:a16="http://schemas.microsoft.com/office/drawing/2014/main" id="{1E9D6124-5BD8-4B93-8EE9-1121B912DB7A}"/>
               </a:ext>
             </a:extLst>
           </p:cNvPr>
@@ -5117,7 +5117,7 @@
           <p:cNvPr id="20" name="">
             <a:extLst xmlns:a="http://schemas.openxmlformats.org/drawingml/2006/main">
               <a:ext uri="{FF2B5EF4-FFF2-40B4-BE49-F238E27FC236}">
-                <a16:creationId xmlns:a16="http://schemas.microsoft.com/office/drawing/2014/main" id="{6089D6DA-05DF-45B5-8B28-234A149E02FD}"/>
+                <a16:creationId xmlns:a16="http://schemas.microsoft.com/office/drawing/2014/main" id="{07199348-98CA-4F45-94AA-16E81842B208}"/>
               </a:ext>
             </a:extLst>
           </p:cNvPr>
@@ -5175,7 +5175,7 @@
           <p:cNvPr id="21" name="">
             <a:extLst xmlns:a="http://schemas.openxmlformats.org/drawingml/2006/main">
               <a:ext uri="{FF2B5EF4-FFF2-40B4-BE49-F238E27FC236}">
-                <a16:creationId xmlns:a16="http://schemas.microsoft.com/office/drawing/2014/main" id="{B0A726C0-597E-40A0-9BCA-A770153DE17D}"/>
+                <a16:creationId xmlns:a16="http://schemas.microsoft.com/office/drawing/2014/main" id="{71C4EEAB-4154-49BB-8C9D-302FE48E64A4}"/>
               </a:ext>
             </a:extLst>
           </p:cNvPr>
@@ -5250,7 +5250,7 @@
           <p:cNvPr id="22" name="">
             <a:extLst xmlns:a="http://schemas.openxmlformats.org/drawingml/2006/main">
               <a:ext uri="{FF2B5EF4-FFF2-40B4-BE49-F238E27FC236}">
-                <a16:creationId xmlns:a16="http://schemas.microsoft.com/office/drawing/2014/main" id="{73269203-48A9-4DEF-8C2C-745623852C59}"/>
+                <a16:creationId xmlns:a16="http://schemas.microsoft.com/office/drawing/2014/main" id="{85916154-D4FC-4BE9-AC2D-82B90863B019}"/>
               </a:ext>
             </a:extLst>
           </p:cNvPr>
@@ -5283,7 +5283,7 @@
           <p:cNvPr id="23" name="">
             <a:extLst xmlns:a="http://schemas.openxmlformats.org/drawingml/2006/main">
               <a:ext uri="{FF2B5EF4-FFF2-40B4-BE49-F238E27FC236}">
-                <a16:creationId xmlns:a16="http://schemas.microsoft.com/office/drawing/2014/main" id="{B817EEA7-957E-4078-A90F-CD467C419F28}"/>
+                <a16:creationId xmlns:a16="http://schemas.microsoft.com/office/drawing/2014/main" id="{DC80BEE6-A956-4FB8-B094-5569236B1F3C}"/>
               </a:ext>
             </a:extLst>
           </p:cNvPr>
@@ -5318,7 +5318,7 @@
           <p:cNvPr id="24" name="">
             <a:extLst xmlns:a="http://schemas.openxmlformats.org/drawingml/2006/main">
               <a:ext uri="{FF2B5EF4-FFF2-40B4-BE49-F238E27FC236}">
-                <a16:creationId xmlns:a16="http://schemas.microsoft.com/office/drawing/2014/main" id="{87E01DB1-4BC0-4DFD-A297-34E8B8F39BCD}"/>
+                <a16:creationId xmlns:a16="http://schemas.microsoft.com/office/drawing/2014/main" id="{95CBEA00-2C28-4ED2-9BAD-2DCA54743FCF}"/>
               </a:ext>
             </a:extLst>
           </p:cNvPr>
@@ -5376,7 +5376,7 @@
           <p:cNvPr id="25" name="">
             <a:extLst xmlns:a="http://schemas.openxmlformats.org/drawingml/2006/main">
               <a:ext uri="{FF2B5EF4-FFF2-40B4-BE49-F238E27FC236}">
-                <a16:creationId xmlns:a16="http://schemas.microsoft.com/office/drawing/2014/main" id="{B0008D5D-E906-46E0-8E20-71D6D9AC5601}"/>
+                <a16:creationId xmlns:a16="http://schemas.microsoft.com/office/drawing/2014/main" id="{953AA6CF-2AA3-44C1-B108-8497EF5425FB}"/>
               </a:ext>
             </a:extLst>
           </p:cNvPr>
@@ -5432,7 +5432,7 @@
     </p:spTree>
     <p:extLst>
       <p:ext uri="{BB962C8B-B14F-4D97-AF65-F5344CB8AC3E}">
-        <p14:creationId xmlns:p14="http://schemas.microsoft.com/office/powerpoint/2010/main" val="436844147"/>
+        <p14:creationId xmlns:p14="http://schemas.microsoft.com/office/powerpoint/2010/main" val="1774863491"/>
       </p:ext>
     </p:extLst>
   </p:cSld>
@@ -5463,7 +5463,7 @@
           <p:cNvPr id="1" name="">
             <a:extLst xmlns:a="http://schemas.openxmlformats.org/drawingml/2006/main">
               <a:ext uri="{FF2B5EF4-FFF2-40B4-BE49-F238E27FC236}">
-                <a16:creationId xmlns:a16="http://schemas.microsoft.com/office/drawing/2014/main" id="{19E63A0F-9C09-4976-858F-177EBC7EE0AF}"/>
+                <a16:creationId xmlns:a16="http://schemas.microsoft.com/office/drawing/2014/main" id="{62F07CC3-FE87-4314-8A11-BF36CA912DAC}"/>
               </a:ext>
             </a:extLst>
           </p:cNvPr>
@@ -5502,7 +5502,7 @@
           <p:nvPr/>
         </p:nvPicPr>
         <p:blipFill>
-          <a:blip xmlns:r="http://schemas.openxmlformats.org/officeDocument/2006/relationships" xmlns:a="http://schemas.openxmlformats.org/drawingml/2006/main" r:embed="Rd052f657951f4622"/>
+          <a:blip xmlns:r="http://schemas.openxmlformats.org/officeDocument/2006/relationships" xmlns:a="http://schemas.openxmlformats.org/drawingml/2006/main" r:embed="R28a971e9955e403e"/>
           <a:stretch xmlns:a="http://schemas.openxmlformats.org/drawingml/2006/main"/>
         </p:blipFill>
         <p:spPr>
@@ -5520,7 +5520,7 @@
           <p:cNvPr id="3" name="">
             <a:extLst xmlns:a="http://schemas.openxmlformats.org/drawingml/2006/main">
               <a:ext uri="{FF2B5EF4-FFF2-40B4-BE49-F238E27FC236}">
-                <a16:creationId xmlns:a16="http://schemas.microsoft.com/office/drawing/2014/main" id="{B917C89F-39FD-4CD1-9B82-434DB01D22EF}"/>
+                <a16:creationId xmlns:a16="http://schemas.microsoft.com/office/drawing/2014/main" id="{9F52778A-7B9F-4AF7-9195-0A566296FF5C}"/>
               </a:ext>
             </a:extLst>
           </p:cNvPr>
@@ -5558,14 +5558,14 @@
             <a:pPr algn="r">
               <a:defRPr sz="825" b="1">
                 <a:solidFill>
-                  <a:srgbClr val="0E1B3E"/>
+                  <a:srgbClr val="070F26"/>
                 </a:solidFill>
               </a:defRPr>
             </a:pPr>
             <a:r>
               <a:rPr sz="825" b="1">
                 <a:solidFill>
-                  <a:srgbClr val="0E1B3E"/>
+                  <a:srgbClr val="070F26"/>
                 </a:solidFill>
               </a:rPr>
               <a:t>NTT DATA UNIVERSITY</a:t>
@@ -5578,7 +5578,7 @@
           <p:cNvPr id="4" name="">
             <a:extLst xmlns:a="http://schemas.openxmlformats.org/drawingml/2006/main">
               <a:ext uri="{FF2B5EF4-FFF2-40B4-BE49-F238E27FC236}">
-                <a16:creationId xmlns:a16="http://schemas.microsoft.com/office/drawing/2014/main" id="{615D3873-71C0-4B1F-B50E-832EB0FA43EA}"/>
+                <a16:creationId xmlns:a16="http://schemas.microsoft.com/office/drawing/2014/main" id="{454E3C85-EA8B-426E-8E19-E9292815100F}"/>
               </a:ext>
             </a:extLst>
           </p:cNvPr>
@@ -5636,7 +5636,7 @@
           <p:cNvPr id="5" name="">
             <a:extLst xmlns:a="http://schemas.openxmlformats.org/drawingml/2006/main">
               <a:ext uri="{FF2B5EF4-FFF2-40B4-BE49-F238E27FC236}">
-                <a16:creationId xmlns:a16="http://schemas.microsoft.com/office/drawing/2014/main" id="{FAF9D8AC-CD69-4239-8512-33297B1BEF6F}"/>
+                <a16:creationId xmlns:a16="http://schemas.microsoft.com/office/drawing/2014/main" id="{C63DFDE4-BE0A-4853-84FF-70573B8F6522}"/>
               </a:ext>
             </a:extLst>
           </p:cNvPr>
@@ -5694,7 +5694,7 @@
           <p:cNvPr id="6" name="">
             <a:extLst xmlns:a="http://schemas.openxmlformats.org/drawingml/2006/main">
               <a:ext uri="{FF2B5EF4-FFF2-40B4-BE49-F238E27FC236}">
-                <a16:creationId xmlns:a16="http://schemas.microsoft.com/office/drawing/2014/main" id="{C06DDB0E-093E-405F-9E5A-D8F01BAADC2A}"/>
+                <a16:creationId xmlns:a16="http://schemas.microsoft.com/office/drawing/2014/main" id="{0BA13DB7-FA1F-4A8E-A0C9-391B0B4A2E93}"/>
               </a:ext>
             </a:extLst>
           </p:cNvPr>
@@ -5732,14 +5732,14 @@
             <a:pPr algn="r">
               <a:defRPr sz="675" b="1">
                 <a:solidFill>
-                  <a:srgbClr val="0E1B3E"/>
+                  <a:srgbClr val="070F26"/>
                 </a:solidFill>
               </a:defRPr>
             </a:pPr>
             <a:r>
               <a:rPr sz="675" b="1">
                 <a:solidFill>
-                  <a:srgbClr val="0E1B3E"/>
+                  <a:srgbClr val="070F26"/>
                 </a:solidFill>
               </a:rPr>
               <a:t>NTT DATA UNIVERSITY</a:t>
@@ -5752,7 +5752,7 @@
           <p:cNvPr id="7" name="">
             <a:extLst xmlns:a="http://schemas.openxmlformats.org/drawingml/2006/main">
               <a:ext uri="{FF2B5EF4-FFF2-40B4-BE49-F238E27FC236}">
-                <a16:creationId xmlns:a16="http://schemas.microsoft.com/office/drawing/2014/main" id="{EDA722BB-C67F-4152-8D25-4384E438D317}"/>
+                <a16:creationId xmlns:a16="http://schemas.microsoft.com/office/drawing/2014/main" id="{F7EA16F8-A6B4-4384-B602-B3DA5D5C90CE}"/>
               </a:ext>
             </a:extLst>
           </p:cNvPr>
@@ -5810,7 +5810,7 @@
           <p:cNvPr id="8" name="">
             <a:extLst xmlns:a="http://schemas.openxmlformats.org/drawingml/2006/main">
               <a:ext uri="{FF2B5EF4-FFF2-40B4-BE49-F238E27FC236}">
-                <a16:creationId xmlns:a16="http://schemas.microsoft.com/office/drawing/2014/main" id="{2947C75B-EDB2-430E-977D-503906492E78}"/>
+                <a16:creationId xmlns:a16="http://schemas.microsoft.com/office/drawing/2014/main" id="{AEE209D7-859A-46B4-BC7A-D5873D21A91D}"/>
               </a:ext>
             </a:extLst>
           </p:cNvPr>
@@ -5848,14 +5848,14 @@
             <a:pPr algn="l">
               <a:defRPr sz="2400" b="0">
                 <a:solidFill>
-                  <a:srgbClr val="0E1B3E"/>
+                  <a:srgbClr val="070F26"/>
                 </a:solidFill>
               </a:defRPr>
             </a:pPr>
             <a:r>
               <a:rPr sz="2400" b="0">
                 <a:solidFill>
-                  <a:srgbClr val="0E1B3E"/>
+                  <a:srgbClr val="070F26"/>
                 </a:solidFill>
               </a:rPr>
               <a:t>Módulos 5 a 8 — produção</a:t>
@@ -5868,7 +5868,7 @@
           <p:cNvPr id="9" name="">
             <a:extLst xmlns:a="http://schemas.openxmlformats.org/drawingml/2006/main">
               <a:ext uri="{FF2B5EF4-FFF2-40B4-BE49-F238E27FC236}">
-                <a16:creationId xmlns:a16="http://schemas.microsoft.com/office/drawing/2014/main" id="{87B76DFF-498D-499B-96E7-8DEA26A037FE}"/>
+                <a16:creationId xmlns:a16="http://schemas.microsoft.com/office/drawing/2014/main" id="{2A48D024-CF2A-4087-AFBA-0C1BCB622A42}"/>
               </a:ext>
             </a:extLst>
           </p:cNvPr>
@@ -5926,7 +5926,7 @@
           <p:cNvPr id="10" name="">
             <a:extLst xmlns:a="http://schemas.openxmlformats.org/drawingml/2006/main">
               <a:ext uri="{FF2B5EF4-FFF2-40B4-BE49-F238E27FC236}">
-                <a16:creationId xmlns:a16="http://schemas.microsoft.com/office/drawing/2014/main" id="{F150CCCE-4742-44F4-8E63-39B0FFE87B62}"/>
+                <a16:creationId xmlns:a16="http://schemas.microsoft.com/office/drawing/2014/main" id="{F21EFCD1-ECBC-42D8-9228-225FCA431EE3}"/>
               </a:ext>
             </a:extLst>
           </p:cNvPr>
@@ -5959,7 +5959,7 @@
           <p:cNvPr id="11" name="">
             <a:extLst xmlns:a="http://schemas.openxmlformats.org/drawingml/2006/main">
               <a:ext uri="{FF2B5EF4-FFF2-40B4-BE49-F238E27FC236}">
-                <a16:creationId xmlns:a16="http://schemas.microsoft.com/office/drawing/2014/main" id="{542C35B5-304E-4EE1-AF61-6E403EE3F518}"/>
+                <a16:creationId xmlns:a16="http://schemas.microsoft.com/office/drawing/2014/main" id="{8A00F6C8-F7E4-4CA0-9361-EA599B76471E}"/>
               </a:ext>
             </a:extLst>
           </p:cNvPr>
@@ -5994,7 +5994,7 @@
           <p:cNvPr id="12" name="">
             <a:extLst xmlns:a="http://schemas.openxmlformats.org/drawingml/2006/main">
               <a:ext uri="{FF2B5EF4-FFF2-40B4-BE49-F238E27FC236}">
-                <a16:creationId xmlns:a16="http://schemas.microsoft.com/office/drawing/2014/main" id="{DBC0F320-CA4A-42E7-A034-A59076F3CB3D}"/>
+                <a16:creationId xmlns:a16="http://schemas.microsoft.com/office/drawing/2014/main" id="{8DBAED79-F607-4097-9EF9-3A60D777479C}"/>
               </a:ext>
             </a:extLst>
           </p:cNvPr>
@@ -6052,7 +6052,7 @@
           <p:cNvPr id="13" name="">
             <a:extLst xmlns:a="http://schemas.openxmlformats.org/drawingml/2006/main">
               <a:ext uri="{FF2B5EF4-FFF2-40B4-BE49-F238E27FC236}">
-                <a16:creationId xmlns:a16="http://schemas.microsoft.com/office/drawing/2014/main" id="{2A23A118-8F09-4C9B-966A-61AFD4CC2762}"/>
+                <a16:creationId xmlns:a16="http://schemas.microsoft.com/office/drawing/2014/main" id="{8352E1E5-3EA6-4297-901F-7625E162F0BE}"/>
               </a:ext>
             </a:extLst>
           </p:cNvPr>
@@ -6127,7 +6127,7 @@
           <p:cNvPr id="14" name="">
             <a:extLst xmlns:a="http://schemas.openxmlformats.org/drawingml/2006/main">
               <a:ext uri="{FF2B5EF4-FFF2-40B4-BE49-F238E27FC236}">
-                <a16:creationId xmlns:a16="http://schemas.microsoft.com/office/drawing/2014/main" id="{D174E5E7-B731-4E9F-91A1-8E981C4CE200}"/>
+                <a16:creationId xmlns:a16="http://schemas.microsoft.com/office/drawing/2014/main" id="{9EAB4B29-018B-4737-81EF-FD007D5BBBBA}"/>
               </a:ext>
             </a:extLst>
           </p:cNvPr>
@@ -6160,7 +6160,7 @@
           <p:cNvPr id="15" name="">
             <a:extLst xmlns:a="http://schemas.openxmlformats.org/drawingml/2006/main">
               <a:ext uri="{FF2B5EF4-FFF2-40B4-BE49-F238E27FC236}">
-                <a16:creationId xmlns:a16="http://schemas.microsoft.com/office/drawing/2014/main" id="{A67B91E0-945F-490D-8253-1CB272A70D4B}"/>
+                <a16:creationId xmlns:a16="http://schemas.microsoft.com/office/drawing/2014/main" id="{647AD01E-F1CC-4E99-88B5-DEFD7BDAECB3}"/>
               </a:ext>
             </a:extLst>
           </p:cNvPr>
@@ -6195,7 +6195,7 @@
           <p:cNvPr id="16" name="">
             <a:extLst xmlns:a="http://schemas.openxmlformats.org/drawingml/2006/main">
               <a:ext uri="{FF2B5EF4-FFF2-40B4-BE49-F238E27FC236}">
-                <a16:creationId xmlns:a16="http://schemas.microsoft.com/office/drawing/2014/main" id="{70EC3DA8-93EA-4529-8464-68E88607F17B}"/>
+                <a16:creationId xmlns:a16="http://schemas.microsoft.com/office/drawing/2014/main" id="{21E251B6-2A72-4F3E-9A93-8A54F6ED69A2}"/>
               </a:ext>
             </a:extLst>
           </p:cNvPr>
@@ -6253,7 +6253,7 @@
           <p:cNvPr id="17" name="">
             <a:extLst xmlns:a="http://schemas.openxmlformats.org/drawingml/2006/main">
               <a:ext uri="{FF2B5EF4-FFF2-40B4-BE49-F238E27FC236}">
-                <a16:creationId xmlns:a16="http://schemas.microsoft.com/office/drawing/2014/main" id="{C7AADF33-ACAC-4C9F-AE35-7C770611B744}"/>
+                <a16:creationId xmlns:a16="http://schemas.microsoft.com/office/drawing/2014/main" id="{8506AC97-6CEC-4BE9-BDDB-BCBC4B7CF964}"/>
               </a:ext>
             </a:extLst>
           </p:cNvPr>
@@ -6328,7 +6328,7 @@
           <p:cNvPr id="18" name="">
             <a:extLst xmlns:a="http://schemas.openxmlformats.org/drawingml/2006/main">
               <a:ext uri="{FF2B5EF4-FFF2-40B4-BE49-F238E27FC236}">
-                <a16:creationId xmlns:a16="http://schemas.microsoft.com/office/drawing/2014/main" id="{B33C24A4-155B-42E4-90B9-712D6D8EE929}"/>
+                <a16:creationId xmlns:a16="http://schemas.microsoft.com/office/drawing/2014/main" id="{48BFCC35-9F26-4262-9C56-D2DF167C13A3}"/>
               </a:ext>
             </a:extLst>
           </p:cNvPr>
@@ -6361,7 +6361,7 @@
           <p:cNvPr id="19" name="">
             <a:extLst xmlns:a="http://schemas.openxmlformats.org/drawingml/2006/main">
               <a:ext uri="{FF2B5EF4-FFF2-40B4-BE49-F238E27FC236}">
-                <a16:creationId xmlns:a16="http://schemas.microsoft.com/office/drawing/2014/main" id="{C30D9743-A2F6-4AF1-A696-9634B22284E5}"/>
+                <a16:creationId xmlns:a16="http://schemas.microsoft.com/office/drawing/2014/main" id="{B135507F-4614-4FAA-83DA-5AB8C518E730}"/>
               </a:ext>
             </a:extLst>
           </p:cNvPr>
@@ -6396,7 +6396,7 @@
           <p:cNvPr id="20" name="">
             <a:extLst xmlns:a="http://schemas.openxmlformats.org/drawingml/2006/main">
               <a:ext uri="{FF2B5EF4-FFF2-40B4-BE49-F238E27FC236}">
-                <a16:creationId xmlns:a16="http://schemas.microsoft.com/office/drawing/2014/main" id="{EFB60741-2C12-4AB6-AB94-8722B137D310}"/>
+                <a16:creationId xmlns:a16="http://schemas.microsoft.com/office/drawing/2014/main" id="{164B476B-F32E-4B37-955A-123CE2777DD6}"/>
               </a:ext>
             </a:extLst>
           </p:cNvPr>
@@ -6454,7 +6454,7 @@
           <p:cNvPr id="21" name="">
             <a:extLst xmlns:a="http://schemas.openxmlformats.org/drawingml/2006/main">
               <a:ext uri="{FF2B5EF4-FFF2-40B4-BE49-F238E27FC236}">
-                <a16:creationId xmlns:a16="http://schemas.microsoft.com/office/drawing/2014/main" id="{19901F86-005F-4367-96ED-920C8253D764}"/>
+                <a16:creationId xmlns:a16="http://schemas.microsoft.com/office/drawing/2014/main" id="{58563CBC-216E-4169-82AE-8158AD1441FB}"/>
               </a:ext>
             </a:extLst>
           </p:cNvPr>
@@ -6529,7 +6529,7 @@
           <p:cNvPr id="22" name="">
             <a:extLst xmlns:a="http://schemas.openxmlformats.org/drawingml/2006/main">
               <a:ext uri="{FF2B5EF4-FFF2-40B4-BE49-F238E27FC236}">
-                <a16:creationId xmlns:a16="http://schemas.microsoft.com/office/drawing/2014/main" id="{881C745D-D506-451A-86FF-C8CC1FFC1789}"/>
+                <a16:creationId xmlns:a16="http://schemas.microsoft.com/office/drawing/2014/main" id="{6CBD6244-DFE5-4DB4-876F-8BC58F9B90E8}"/>
               </a:ext>
             </a:extLst>
           </p:cNvPr>
@@ -6562,7 +6562,7 @@
           <p:cNvPr id="23" name="">
             <a:extLst xmlns:a="http://schemas.openxmlformats.org/drawingml/2006/main">
               <a:ext uri="{FF2B5EF4-FFF2-40B4-BE49-F238E27FC236}">
-                <a16:creationId xmlns:a16="http://schemas.microsoft.com/office/drawing/2014/main" id="{4E0D30F6-05D1-44F2-B731-719C88E8C0AD}"/>
+                <a16:creationId xmlns:a16="http://schemas.microsoft.com/office/drawing/2014/main" id="{94F2B1C0-8619-49C2-82F9-73F8E238E214}"/>
               </a:ext>
             </a:extLst>
           </p:cNvPr>
@@ -6597,7 +6597,7 @@
           <p:cNvPr id="24" name="">
             <a:extLst xmlns:a="http://schemas.openxmlformats.org/drawingml/2006/main">
               <a:ext uri="{FF2B5EF4-FFF2-40B4-BE49-F238E27FC236}">
-                <a16:creationId xmlns:a16="http://schemas.microsoft.com/office/drawing/2014/main" id="{31289305-06AA-4913-996B-D1851E8C03CF}"/>
+                <a16:creationId xmlns:a16="http://schemas.microsoft.com/office/drawing/2014/main" id="{5055158C-D4AF-4E3B-89EF-0D9A6C035566}"/>
               </a:ext>
             </a:extLst>
           </p:cNvPr>
@@ -6655,7 +6655,7 @@
           <p:cNvPr id="25" name="">
             <a:extLst xmlns:a="http://schemas.openxmlformats.org/drawingml/2006/main">
               <a:ext uri="{FF2B5EF4-FFF2-40B4-BE49-F238E27FC236}">
-                <a16:creationId xmlns:a16="http://schemas.microsoft.com/office/drawing/2014/main" id="{8D9826F4-4565-4821-AD93-DB9CE8A274A7}"/>
+                <a16:creationId xmlns:a16="http://schemas.microsoft.com/office/drawing/2014/main" id="{DB759BD0-AD05-4984-B779-1D54B24DA344}"/>
               </a:ext>
             </a:extLst>
           </p:cNvPr>
@@ -6728,7 +6728,7 @@
     </p:spTree>
     <p:extLst>
       <p:ext uri="{BB962C8B-B14F-4D97-AF65-F5344CB8AC3E}">
-        <p14:creationId xmlns:p14="http://schemas.microsoft.com/office/powerpoint/2010/main" val="436824575"/>
+        <p14:creationId xmlns:p14="http://schemas.microsoft.com/office/powerpoint/2010/main" val="791462294"/>
       </p:ext>
     </p:extLst>
   </p:cSld>
@@ -6759,7 +6759,7 @@
           <p:cNvPr id="1" name="">
             <a:extLst xmlns:a="http://schemas.openxmlformats.org/drawingml/2006/main">
               <a:ext uri="{FF2B5EF4-FFF2-40B4-BE49-F238E27FC236}">
-                <a16:creationId xmlns:a16="http://schemas.microsoft.com/office/drawing/2014/main" id="{1B059B2F-F2B6-4889-A383-5B6F4C276CE6}"/>
+                <a16:creationId xmlns:a16="http://schemas.microsoft.com/office/drawing/2014/main" id="{105A4D73-8731-478E-A988-B1C9ED04BF50}"/>
               </a:ext>
             </a:extLst>
           </p:cNvPr>
@@ -6798,7 +6798,7 @@
           <p:nvPr/>
         </p:nvPicPr>
         <p:blipFill>
-          <a:blip xmlns:r="http://schemas.openxmlformats.org/officeDocument/2006/relationships" xmlns:a="http://schemas.openxmlformats.org/drawingml/2006/main" r:embed="R7129b55b31f94b50"/>
+          <a:blip xmlns:r="http://schemas.openxmlformats.org/officeDocument/2006/relationships" xmlns:a="http://schemas.openxmlformats.org/drawingml/2006/main" r:embed="Rd54a883b0a1f4257"/>
           <a:stretch xmlns:a="http://schemas.openxmlformats.org/drawingml/2006/main"/>
         </p:blipFill>
         <p:spPr>
@@ -6816,7 +6816,7 @@
           <p:cNvPr id="3" name="">
             <a:extLst xmlns:a="http://schemas.openxmlformats.org/drawingml/2006/main">
               <a:ext uri="{FF2B5EF4-FFF2-40B4-BE49-F238E27FC236}">
-                <a16:creationId xmlns:a16="http://schemas.microsoft.com/office/drawing/2014/main" id="{C1A0DEE7-061A-40B3-962E-405EEC0139E1}"/>
+                <a16:creationId xmlns:a16="http://schemas.microsoft.com/office/drawing/2014/main" id="{33B55DBE-7430-456A-9ECB-464729E16FF3}"/>
               </a:ext>
             </a:extLst>
           </p:cNvPr>
@@ -6854,14 +6854,14 @@
             <a:pPr algn="r">
               <a:defRPr sz="825" b="1">
                 <a:solidFill>
-                  <a:srgbClr val="0E1B3E"/>
+                  <a:srgbClr val="070F26"/>
                 </a:solidFill>
               </a:defRPr>
             </a:pPr>
             <a:r>
               <a:rPr sz="825" b="1">
                 <a:solidFill>
-                  <a:srgbClr val="0E1B3E"/>
+                  <a:srgbClr val="070F26"/>
                 </a:solidFill>
               </a:rPr>
               <a:t>NTT DATA UNIVERSITY</a:t>
@@ -6874,7 +6874,7 @@
           <p:cNvPr id="4" name="">
             <a:extLst xmlns:a="http://schemas.openxmlformats.org/drawingml/2006/main">
               <a:ext uri="{FF2B5EF4-FFF2-40B4-BE49-F238E27FC236}">
-                <a16:creationId xmlns:a16="http://schemas.microsoft.com/office/drawing/2014/main" id="{26E990E5-9AF1-4ED5-898C-277E6FEDB14A}"/>
+                <a16:creationId xmlns:a16="http://schemas.microsoft.com/office/drawing/2014/main" id="{3F89E63B-4345-4AEB-BF78-65393F5B2E96}"/>
               </a:ext>
             </a:extLst>
           </p:cNvPr>
@@ -6932,7 +6932,7 @@
           <p:cNvPr id="5" name="">
             <a:extLst xmlns:a="http://schemas.openxmlformats.org/drawingml/2006/main">
               <a:ext uri="{FF2B5EF4-FFF2-40B4-BE49-F238E27FC236}">
-                <a16:creationId xmlns:a16="http://schemas.microsoft.com/office/drawing/2014/main" id="{38B98E2D-ADD1-409C-8E77-1980F08DE1B0}"/>
+                <a16:creationId xmlns:a16="http://schemas.microsoft.com/office/drawing/2014/main" id="{2DCEDBA2-E49F-45D3-9568-3211C83A71F8}"/>
               </a:ext>
             </a:extLst>
           </p:cNvPr>
@@ -6990,7 +6990,7 @@
           <p:cNvPr id="6" name="">
             <a:extLst xmlns:a="http://schemas.openxmlformats.org/drawingml/2006/main">
               <a:ext uri="{FF2B5EF4-FFF2-40B4-BE49-F238E27FC236}">
-                <a16:creationId xmlns:a16="http://schemas.microsoft.com/office/drawing/2014/main" id="{F3A4DEEE-E4AD-4CB3-BE73-81EEB78976B8}"/>
+                <a16:creationId xmlns:a16="http://schemas.microsoft.com/office/drawing/2014/main" id="{EDAAF93F-5BCF-4C90-9541-C22175DA2711}"/>
               </a:ext>
             </a:extLst>
           </p:cNvPr>
@@ -7028,14 +7028,14 @@
             <a:pPr algn="r">
               <a:defRPr sz="675" b="1">
                 <a:solidFill>
-                  <a:srgbClr val="0E1B3E"/>
+                  <a:srgbClr val="070F26"/>
                 </a:solidFill>
               </a:defRPr>
             </a:pPr>
             <a:r>
               <a:rPr sz="675" b="1">
                 <a:solidFill>
-                  <a:srgbClr val="0E1B3E"/>
+                  <a:srgbClr val="070F26"/>
                 </a:solidFill>
               </a:rPr>
               <a:t>NTT DATA UNIVERSITY</a:t>
@@ -7048,7 +7048,7 @@
           <p:cNvPr id="7" name="">
             <a:extLst xmlns:a="http://schemas.openxmlformats.org/drawingml/2006/main">
               <a:ext uri="{FF2B5EF4-FFF2-40B4-BE49-F238E27FC236}">
-                <a16:creationId xmlns:a16="http://schemas.microsoft.com/office/drawing/2014/main" id="{A8FB4A66-79F2-4F90-8194-011E7FE2356B}"/>
+                <a16:creationId xmlns:a16="http://schemas.microsoft.com/office/drawing/2014/main" id="{42F314AC-86C4-4FE8-A838-5D0AEAC114B1}"/>
               </a:ext>
             </a:extLst>
           </p:cNvPr>
@@ -7106,7 +7106,7 @@
           <p:cNvPr id="8" name="">
             <a:extLst xmlns:a="http://schemas.openxmlformats.org/drawingml/2006/main">
               <a:ext uri="{FF2B5EF4-FFF2-40B4-BE49-F238E27FC236}">
-                <a16:creationId xmlns:a16="http://schemas.microsoft.com/office/drawing/2014/main" id="{FB0FE71F-D252-4979-BB7F-A9ED65DA22FF}"/>
+                <a16:creationId xmlns:a16="http://schemas.microsoft.com/office/drawing/2014/main" id="{33860EEA-5BD2-4990-8643-886BF37951B8}"/>
               </a:ext>
             </a:extLst>
           </p:cNvPr>
@@ -7144,14 +7144,14 @@
             <a:pPr algn="l">
               <a:defRPr sz="2400" b="0">
                 <a:solidFill>
-                  <a:srgbClr val="0E1B3E"/>
+                  <a:srgbClr val="070F26"/>
                 </a:solidFill>
               </a:defRPr>
             </a:pPr>
             <a:r>
               <a:rPr sz="2400" b="0">
                 <a:solidFill>
-                  <a:srgbClr val="0E1B3E"/>
+                  <a:srgbClr val="070F26"/>
                 </a:solidFill>
               </a:rPr>
               <a:t>Ferramentas específicas que apoiam o que vocês aprenderam</a:t>
@@ -7164,7 +7164,7 @@
           <p:cNvPr id="9" name="">
             <a:extLst xmlns:a="http://schemas.openxmlformats.org/drawingml/2006/main">
               <a:ext uri="{FF2B5EF4-FFF2-40B4-BE49-F238E27FC236}">
-                <a16:creationId xmlns:a16="http://schemas.microsoft.com/office/drawing/2014/main" id="{762AF4A3-C996-4DA5-AC98-6755E8DCD47F}"/>
+                <a16:creationId xmlns:a16="http://schemas.microsoft.com/office/drawing/2014/main" id="{78A390B1-D2DA-4F1A-85B6-FBD0F7E95220}"/>
               </a:ext>
             </a:extLst>
           </p:cNvPr>
@@ -7222,7 +7222,7 @@
           <p:cNvPr id="10" name="">
             <a:extLst xmlns:a="http://schemas.openxmlformats.org/drawingml/2006/main">
               <a:ext uri="{FF2B5EF4-FFF2-40B4-BE49-F238E27FC236}">
-                <a16:creationId xmlns:a16="http://schemas.microsoft.com/office/drawing/2014/main" id="{4A063738-AF64-445D-8A7E-C694E6D5EA44}"/>
+                <a16:creationId xmlns:a16="http://schemas.microsoft.com/office/drawing/2014/main" id="{038EB35D-9968-4508-B89D-0CCD05A50ADA}"/>
               </a:ext>
             </a:extLst>
           </p:cNvPr>
@@ -7255,7 +7255,7 @@
           <p:cNvPr id="11" name="">
             <a:extLst xmlns:a="http://schemas.openxmlformats.org/drawingml/2006/main">
               <a:ext uri="{FF2B5EF4-FFF2-40B4-BE49-F238E27FC236}">
-                <a16:creationId xmlns:a16="http://schemas.microsoft.com/office/drawing/2014/main" id="{2F5F2272-6691-48D0-873E-455F6557757C}"/>
+                <a16:creationId xmlns:a16="http://schemas.microsoft.com/office/drawing/2014/main" id="{02CD7F9F-7C24-4A5E-9D46-84A6CB377EF8}"/>
               </a:ext>
             </a:extLst>
           </p:cNvPr>
@@ -7290,7 +7290,7 @@
           <p:cNvPr id="12" name="">
             <a:extLst xmlns:a="http://schemas.openxmlformats.org/drawingml/2006/main">
               <a:ext uri="{FF2B5EF4-FFF2-40B4-BE49-F238E27FC236}">
-                <a16:creationId xmlns:a16="http://schemas.microsoft.com/office/drawing/2014/main" id="{61E4CDAC-17D5-484B-8E1A-AA2D2DBB5DED}"/>
+                <a16:creationId xmlns:a16="http://schemas.microsoft.com/office/drawing/2014/main" id="{92BF53D7-5E87-4487-B574-43DF0A26B460}"/>
               </a:ext>
             </a:extLst>
           </p:cNvPr>
@@ -7348,7 +7348,7 @@
           <p:cNvPr id="13" name="">
             <a:extLst xmlns:a="http://schemas.openxmlformats.org/drawingml/2006/main">
               <a:ext uri="{FF2B5EF4-FFF2-40B4-BE49-F238E27FC236}">
-                <a16:creationId xmlns:a16="http://schemas.microsoft.com/office/drawing/2014/main" id="{060749DE-06B1-44D7-83E3-9BB6CF932CF3}"/>
+                <a16:creationId xmlns:a16="http://schemas.microsoft.com/office/drawing/2014/main" id="{FB9A7A72-3068-4493-B11A-1BA5DC9C57AA}"/>
               </a:ext>
             </a:extLst>
           </p:cNvPr>
@@ -7440,7 +7440,7 @@
           <p:cNvPr id="14" name="">
             <a:extLst xmlns:a="http://schemas.openxmlformats.org/drawingml/2006/main">
               <a:ext uri="{FF2B5EF4-FFF2-40B4-BE49-F238E27FC236}">
-                <a16:creationId xmlns:a16="http://schemas.microsoft.com/office/drawing/2014/main" id="{92BAB02D-688C-4122-A016-45A9CBB56352}"/>
+                <a16:creationId xmlns:a16="http://schemas.microsoft.com/office/drawing/2014/main" id="{B5F921B1-E186-4190-8A27-B98017BAF7CD}"/>
               </a:ext>
             </a:extLst>
           </p:cNvPr>
@@ -7473,7 +7473,7 @@
           <p:cNvPr id="15" name="">
             <a:extLst xmlns:a="http://schemas.openxmlformats.org/drawingml/2006/main">
               <a:ext uri="{FF2B5EF4-FFF2-40B4-BE49-F238E27FC236}">
-                <a16:creationId xmlns:a16="http://schemas.microsoft.com/office/drawing/2014/main" id="{0A6D3BA4-90A5-4A4F-B451-B5E0A3151505}"/>
+                <a16:creationId xmlns:a16="http://schemas.microsoft.com/office/drawing/2014/main" id="{A044D4E7-10F7-46F7-9586-0D2673921B98}"/>
               </a:ext>
             </a:extLst>
           </p:cNvPr>
@@ -7508,7 +7508,7 @@
           <p:cNvPr id="16" name="">
             <a:extLst xmlns:a="http://schemas.openxmlformats.org/drawingml/2006/main">
               <a:ext uri="{FF2B5EF4-FFF2-40B4-BE49-F238E27FC236}">
-                <a16:creationId xmlns:a16="http://schemas.microsoft.com/office/drawing/2014/main" id="{97D2786C-D454-4AEA-9490-9F93452595DA}"/>
+                <a16:creationId xmlns:a16="http://schemas.microsoft.com/office/drawing/2014/main" id="{1ABC7D33-825A-472A-98B4-4ABC7010B07A}"/>
               </a:ext>
             </a:extLst>
           </p:cNvPr>
@@ -7566,7 +7566,7 @@
           <p:cNvPr id="17" name="">
             <a:extLst xmlns:a="http://schemas.openxmlformats.org/drawingml/2006/main">
               <a:ext uri="{FF2B5EF4-FFF2-40B4-BE49-F238E27FC236}">
-                <a16:creationId xmlns:a16="http://schemas.microsoft.com/office/drawing/2014/main" id="{E1EF0333-F1B6-444D-BAFC-0C980AF66B0C}"/>
+                <a16:creationId xmlns:a16="http://schemas.microsoft.com/office/drawing/2014/main" id="{50E78F41-B11C-4ACC-BAE0-7DD609291C1A}"/>
               </a:ext>
             </a:extLst>
           </p:cNvPr>
@@ -7658,7 +7658,7 @@
           <p:cNvPr id="18" name="">
             <a:extLst xmlns:a="http://schemas.openxmlformats.org/drawingml/2006/main">
               <a:ext uri="{FF2B5EF4-FFF2-40B4-BE49-F238E27FC236}">
-                <a16:creationId xmlns:a16="http://schemas.microsoft.com/office/drawing/2014/main" id="{977855A9-49E6-4AFF-9EBC-0DE17559CC0C}"/>
+                <a16:creationId xmlns:a16="http://schemas.microsoft.com/office/drawing/2014/main" id="{84C8B51E-D154-4D2E-822C-3AC09DC391C6}"/>
               </a:ext>
             </a:extLst>
           </p:cNvPr>
@@ -7691,7 +7691,7 @@
           <p:cNvPr id="19" name="">
             <a:extLst xmlns:a="http://schemas.openxmlformats.org/drawingml/2006/main">
               <a:ext uri="{FF2B5EF4-FFF2-40B4-BE49-F238E27FC236}">
-                <a16:creationId xmlns:a16="http://schemas.microsoft.com/office/drawing/2014/main" id="{EEE553C4-1597-42E5-B648-D8A2C7ABCE79}"/>
+                <a16:creationId xmlns:a16="http://schemas.microsoft.com/office/drawing/2014/main" id="{0DC60B1C-8F1D-488F-A9DA-122157CC1196}"/>
               </a:ext>
             </a:extLst>
           </p:cNvPr>
@@ -7726,7 +7726,7 @@
           <p:cNvPr id="20" name="">
             <a:extLst xmlns:a="http://schemas.openxmlformats.org/drawingml/2006/main">
               <a:ext uri="{FF2B5EF4-FFF2-40B4-BE49-F238E27FC236}">
-                <a16:creationId xmlns:a16="http://schemas.microsoft.com/office/drawing/2014/main" id="{9C6F218E-B6B9-4D55-B5BE-7D114B406B3A}"/>
+                <a16:creationId xmlns:a16="http://schemas.microsoft.com/office/drawing/2014/main" id="{BEF93B79-2AC2-4074-9E8E-99085999C928}"/>
               </a:ext>
             </a:extLst>
           </p:cNvPr>
@@ -7784,7 +7784,7 @@
           <p:cNvPr id="21" name="">
             <a:extLst xmlns:a="http://schemas.openxmlformats.org/drawingml/2006/main">
               <a:ext uri="{FF2B5EF4-FFF2-40B4-BE49-F238E27FC236}">
-                <a16:creationId xmlns:a16="http://schemas.microsoft.com/office/drawing/2014/main" id="{07FDA201-EDCC-43A5-A29D-1E688511DE64}"/>
+                <a16:creationId xmlns:a16="http://schemas.microsoft.com/office/drawing/2014/main" id="{243809EA-40A8-4C87-BF25-29BF885E65BF}"/>
               </a:ext>
             </a:extLst>
           </p:cNvPr>
@@ -7874,7 +7874,7 @@
     </p:spTree>
     <p:extLst>
       <p:ext uri="{BB962C8B-B14F-4D97-AF65-F5344CB8AC3E}">
-        <p14:creationId xmlns:p14="http://schemas.microsoft.com/office/powerpoint/2010/main" val="2094199800"/>
+        <p14:creationId xmlns:p14="http://schemas.microsoft.com/office/powerpoint/2010/main" val="180285592"/>
       </p:ext>
     </p:extLst>
   </p:cSld>
@@ -7887,7 +7887,7 @@
     <p:bg>
       <p:bgPr>
         <a:solidFill xmlns:a="http://schemas.openxmlformats.org/drawingml/2006/main">
-          <a:srgbClr val="0E1B3E"/>
+          <a:srgbClr val="070F26"/>
         </a:solidFill>
       </p:bgPr>
     </p:bg>
@@ -7905,7 +7905,7 @@
           <p:cNvPr id="1" name="">
             <a:extLst xmlns:a="http://schemas.openxmlformats.org/drawingml/2006/main">
               <a:ext uri="{FF2B5EF4-FFF2-40B4-BE49-F238E27FC236}">
-                <a16:creationId xmlns:a16="http://schemas.microsoft.com/office/drawing/2014/main" id="{407C23AC-C3F2-4973-89BD-4391F6A1E239}"/>
+                <a16:creationId xmlns:a16="http://schemas.microsoft.com/office/drawing/2014/main" id="{B6CF17E2-918C-4029-81AF-AD98BEF767D1}"/>
               </a:ext>
             </a:extLst>
           </p:cNvPr>
@@ -7923,7 +7923,7 @@
             <a:avLst/>
           </a:prstGeom>
           <a:solidFill xmlns:a="http://schemas.openxmlformats.org/drawingml/2006/main">
-            <a:srgbClr val="0E1B3E"/>
+            <a:srgbClr val="070F26"/>
           </a:solidFill>
           <a:ln xmlns:a="http://schemas.openxmlformats.org/drawingml/2006/main" w="0">
             <a:solidFill>
@@ -7944,7 +7944,7 @@
           <p:nvPr/>
         </p:nvPicPr>
         <p:blipFill>
-          <a:blip xmlns:r="http://schemas.openxmlformats.org/officeDocument/2006/relationships" xmlns:a="http://schemas.openxmlformats.org/drawingml/2006/main" r:embed="R233cdde71cfd442c"/>
+          <a:blip xmlns:r="http://schemas.openxmlformats.org/officeDocument/2006/relationships" xmlns:a="http://schemas.openxmlformats.org/drawingml/2006/main" r:embed="Ra5fc15c714904dbd"/>
           <a:stretch xmlns:a="http://schemas.openxmlformats.org/drawingml/2006/main"/>
         </p:blipFill>
         <p:spPr>
@@ -7962,7 +7962,7 @@
           <p:cNvPr id="3" name="">
             <a:extLst xmlns:a="http://schemas.openxmlformats.org/drawingml/2006/main">
               <a:ext uri="{FF2B5EF4-FFF2-40B4-BE49-F238E27FC236}">
-                <a16:creationId xmlns:a16="http://schemas.microsoft.com/office/drawing/2014/main" id="{FCFE1ADD-67AD-4F2A-83F4-4C056E6ED4BF}"/>
+                <a16:creationId xmlns:a16="http://schemas.microsoft.com/office/drawing/2014/main" id="{C3D81774-2D2A-457E-853F-5B4F6C06C15F}"/>
               </a:ext>
             </a:extLst>
           </p:cNvPr>
@@ -8020,7 +8020,7 @@
           <p:cNvPr id="4" name="">
             <a:extLst xmlns:a="http://schemas.openxmlformats.org/drawingml/2006/main">
               <a:ext uri="{FF2B5EF4-FFF2-40B4-BE49-F238E27FC236}">
-                <a16:creationId xmlns:a16="http://schemas.microsoft.com/office/drawing/2014/main" id="{B362E337-725E-4D91-8F3E-F5ABD4BF01EC}"/>
+                <a16:creationId xmlns:a16="http://schemas.microsoft.com/office/drawing/2014/main" id="{F3173B4D-D726-4E7B-944D-B5C9149BA2E4}"/>
               </a:ext>
             </a:extLst>
           </p:cNvPr>
@@ -8078,7 +8078,7 @@
           <p:cNvPr id="5" name="">
             <a:extLst xmlns:a="http://schemas.openxmlformats.org/drawingml/2006/main">
               <a:ext uri="{FF2B5EF4-FFF2-40B4-BE49-F238E27FC236}">
-                <a16:creationId xmlns:a16="http://schemas.microsoft.com/office/drawing/2014/main" id="{974C49E2-2DB1-476B-9AB3-CAF8BEE89BE8}"/>
+                <a16:creationId xmlns:a16="http://schemas.microsoft.com/office/drawing/2014/main" id="{4D6AB79C-B121-465C-9C66-D0FB9687EF91}"/>
               </a:ext>
             </a:extLst>
           </p:cNvPr>
@@ -8140,7 +8140,7 @@
           <p:nvPr/>
         </p:nvPicPr>
         <p:blipFill>
-          <a:blip xmlns:r="http://schemas.openxmlformats.org/officeDocument/2006/relationships" xmlns:a="http://schemas.openxmlformats.org/drawingml/2006/main" r:embed="Rf7509d6701a1473e"/>
+          <a:blip xmlns:r="http://schemas.openxmlformats.org/officeDocument/2006/relationships" xmlns:a="http://schemas.openxmlformats.org/drawingml/2006/main" r:embed="Rd06f8d1c8a914153"/>
           <a:stretch xmlns:a="http://schemas.openxmlformats.org/drawingml/2006/main"/>
         </p:blipFill>
         <p:spPr>
@@ -8158,7 +8158,7 @@
           <p:cNvPr id="7" name="">
             <a:extLst xmlns:a="http://schemas.openxmlformats.org/drawingml/2006/main">
               <a:ext uri="{FF2B5EF4-FFF2-40B4-BE49-F238E27FC236}">
-                <a16:creationId xmlns:a16="http://schemas.microsoft.com/office/drawing/2014/main" id="{F5249AB8-DEF9-4F73-9BC7-31B9C2ABF2CE}"/>
+                <a16:creationId xmlns:a16="http://schemas.microsoft.com/office/drawing/2014/main" id="{BB73A9E0-1138-4759-8E91-69F5F5ECAA83}"/>
               </a:ext>
             </a:extLst>
           </p:cNvPr>
@@ -8216,7 +8216,7 @@
           <p:cNvPr id="8" name="">
             <a:extLst xmlns:a="http://schemas.openxmlformats.org/drawingml/2006/main">
               <a:ext uri="{FF2B5EF4-FFF2-40B4-BE49-F238E27FC236}">
-                <a16:creationId xmlns:a16="http://schemas.microsoft.com/office/drawing/2014/main" id="{BC0849E4-C026-4D8C-8B0D-77BA15B9087C}"/>
+                <a16:creationId xmlns:a16="http://schemas.microsoft.com/office/drawing/2014/main" id="{5BC0014A-7C1F-473D-9657-42B4DFA1C0A9}"/>
               </a:ext>
             </a:extLst>
           </p:cNvPr>
@@ -8272,7 +8272,7 @@
     </p:spTree>
     <p:extLst>
       <p:ext uri="{BB962C8B-B14F-4D97-AF65-F5344CB8AC3E}">
-        <p14:creationId xmlns:p14="http://schemas.microsoft.com/office/powerpoint/2010/main" val="871619753"/>
+        <p14:creationId xmlns:p14="http://schemas.microsoft.com/office/powerpoint/2010/main" val="1453060581"/>
       </p:ext>
     </p:extLst>
   </p:cSld>
@@ -8303,7 +8303,7 @@
           <p:cNvPr id="1" name="">
             <a:extLst xmlns:a="http://schemas.openxmlformats.org/drawingml/2006/main">
               <a:ext uri="{FF2B5EF4-FFF2-40B4-BE49-F238E27FC236}">
-                <a16:creationId xmlns:a16="http://schemas.microsoft.com/office/drawing/2014/main" id="{38BF0E4D-BC5D-4F92-B5EE-ACF987FDD603}"/>
+                <a16:creationId xmlns:a16="http://schemas.microsoft.com/office/drawing/2014/main" id="{3FF4450D-D7A7-4F9B-848C-77117F52A0FB}"/>
               </a:ext>
             </a:extLst>
           </p:cNvPr>
@@ -8342,7 +8342,7 @@
           <p:nvPr/>
         </p:nvPicPr>
         <p:blipFill>
-          <a:blip xmlns:r="http://schemas.openxmlformats.org/officeDocument/2006/relationships" xmlns:a="http://schemas.openxmlformats.org/drawingml/2006/main" r:embed="R1e8d62c95d6849c5"/>
+          <a:blip xmlns:r="http://schemas.openxmlformats.org/officeDocument/2006/relationships" xmlns:a="http://schemas.openxmlformats.org/drawingml/2006/main" r:embed="R47e94de9aadb47b5"/>
           <a:stretch xmlns:a="http://schemas.openxmlformats.org/drawingml/2006/main"/>
         </p:blipFill>
         <p:spPr>
@@ -8360,7 +8360,7 @@
           <p:cNvPr id="3" name="">
             <a:extLst xmlns:a="http://schemas.openxmlformats.org/drawingml/2006/main">
               <a:ext uri="{FF2B5EF4-FFF2-40B4-BE49-F238E27FC236}">
-                <a16:creationId xmlns:a16="http://schemas.microsoft.com/office/drawing/2014/main" id="{D4693B9D-C22B-43D4-B0A6-BE92FCFC5A42}"/>
+                <a16:creationId xmlns:a16="http://schemas.microsoft.com/office/drawing/2014/main" id="{9E2A0D98-35F0-4D35-BE42-E1E0A8DB310E}"/>
               </a:ext>
             </a:extLst>
           </p:cNvPr>
@@ -8398,14 +8398,14 @@
             <a:pPr algn="r">
               <a:defRPr sz="825" b="1">
                 <a:solidFill>
-                  <a:srgbClr val="0E1B3E"/>
+                  <a:srgbClr val="070F26"/>
                 </a:solidFill>
               </a:defRPr>
             </a:pPr>
             <a:r>
               <a:rPr sz="825" b="1">
                 <a:solidFill>
-                  <a:srgbClr val="0E1B3E"/>
+                  <a:srgbClr val="070F26"/>
                 </a:solidFill>
               </a:rPr>
               <a:t>NTT DATA UNIVERSITY</a:t>
@@ -8418,7 +8418,7 @@
           <p:cNvPr id="4" name="">
             <a:extLst xmlns:a="http://schemas.openxmlformats.org/drawingml/2006/main">
               <a:ext uri="{FF2B5EF4-FFF2-40B4-BE49-F238E27FC236}">
-                <a16:creationId xmlns:a16="http://schemas.microsoft.com/office/drawing/2014/main" id="{1DFA1CD3-2557-44E5-A2C7-4C531B8E442B}"/>
+                <a16:creationId xmlns:a16="http://schemas.microsoft.com/office/drawing/2014/main" id="{0519D983-CF54-4520-8F59-F61304032255}"/>
               </a:ext>
             </a:extLst>
           </p:cNvPr>
@@ -8476,7 +8476,7 @@
           <p:cNvPr id="5" name="">
             <a:extLst xmlns:a="http://schemas.openxmlformats.org/drawingml/2006/main">
               <a:ext uri="{FF2B5EF4-FFF2-40B4-BE49-F238E27FC236}">
-                <a16:creationId xmlns:a16="http://schemas.microsoft.com/office/drawing/2014/main" id="{FC5E9B71-83F1-45E3-AAAF-0FE97E1A58FA}"/>
+                <a16:creationId xmlns:a16="http://schemas.microsoft.com/office/drawing/2014/main" id="{FD93E349-FD13-4BD9-8BB2-F5F798C452A4}"/>
               </a:ext>
             </a:extLst>
           </p:cNvPr>
@@ -8534,7 +8534,7 @@
           <p:cNvPr id="6" name="">
             <a:extLst xmlns:a="http://schemas.openxmlformats.org/drawingml/2006/main">
               <a:ext uri="{FF2B5EF4-FFF2-40B4-BE49-F238E27FC236}">
-                <a16:creationId xmlns:a16="http://schemas.microsoft.com/office/drawing/2014/main" id="{8037A999-C610-49A8-B2E7-D9362548B9C0}"/>
+                <a16:creationId xmlns:a16="http://schemas.microsoft.com/office/drawing/2014/main" id="{E2D42855-A553-46DC-A07C-57A9153DEDBA}"/>
               </a:ext>
             </a:extLst>
           </p:cNvPr>
@@ -8572,14 +8572,14 @@
             <a:pPr algn="r">
               <a:defRPr sz="675" b="1">
                 <a:solidFill>
-                  <a:srgbClr val="0E1B3E"/>
+                  <a:srgbClr val="070F26"/>
                 </a:solidFill>
               </a:defRPr>
             </a:pPr>
             <a:r>
               <a:rPr sz="675" b="1">
                 <a:solidFill>
-                  <a:srgbClr val="0E1B3E"/>
+                  <a:srgbClr val="070F26"/>
                 </a:solidFill>
               </a:rPr>
               <a:t>NTT DATA UNIVERSITY</a:t>
@@ -8592,7 +8592,7 @@
           <p:cNvPr id="7" name="">
             <a:extLst xmlns:a="http://schemas.openxmlformats.org/drawingml/2006/main">
               <a:ext uri="{FF2B5EF4-FFF2-40B4-BE49-F238E27FC236}">
-                <a16:creationId xmlns:a16="http://schemas.microsoft.com/office/drawing/2014/main" id="{2642FF47-D19E-42ED-A819-4B99EE1126D0}"/>
+                <a16:creationId xmlns:a16="http://schemas.microsoft.com/office/drawing/2014/main" id="{DC4AFA50-6D02-45E8-A9A2-EE426195DC6C}"/>
               </a:ext>
             </a:extLst>
           </p:cNvPr>
@@ -8650,7 +8650,7 @@
           <p:cNvPr id="8" name="">
             <a:extLst xmlns:a="http://schemas.openxmlformats.org/drawingml/2006/main">
               <a:ext uri="{FF2B5EF4-FFF2-40B4-BE49-F238E27FC236}">
-                <a16:creationId xmlns:a16="http://schemas.microsoft.com/office/drawing/2014/main" id="{17E5C1DB-9332-46B8-9D37-190C6DFBFB9D}"/>
+                <a16:creationId xmlns:a16="http://schemas.microsoft.com/office/drawing/2014/main" id="{A7171373-2148-4FAB-8514-43584253CA75}"/>
               </a:ext>
             </a:extLst>
           </p:cNvPr>
@@ -8688,14 +8688,14 @@
             <a:pPr algn="l">
               <a:defRPr sz="2400" b="0">
                 <a:solidFill>
-                  <a:srgbClr val="0E1B3E"/>
+                  <a:srgbClr val="070F26"/>
                 </a:solidFill>
               </a:defRPr>
             </a:pPr>
             <a:r>
               <a:rPr sz="2400" b="0">
                 <a:solidFill>
-                  <a:srgbClr val="0E1B3E"/>
+                  <a:srgbClr val="070F26"/>
                 </a:solidFill>
               </a:rPr>
               <a:t>Última sessão da trilha — qualidade, TDD e celebração</a:t>
@@ -8708,7 +8708,7 @@
           <p:cNvPr id="9" name="">
             <a:extLst xmlns:a="http://schemas.openxmlformats.org/drawingml/2006/main">
               <a:ext uri="{FF2B5EF4-FFF2-40B4-BE49-F238E27FC236}">
-                <a16:creationId xmlns:a16="http://schemas.microsoft.com/office/drawing/2014/main" id="{80DF7972-C20C-4EE0-B78C-C497EB737925}"/>
+                <a16:creationId xmlns:a16="http://schemas.microsoft.com/office/drawing/2014/main" id="{A9C65214-8132-44D2-9DC9-2C32D98B326E}"/>
               </a:ext>
             </a:extLst>
           </p:cNvPr>
@@ -8766,7 +8766,7 @@
           <p:cNvPr id="10" name="">
             <a:extLst xmlns:a="http://schemas.openxmlformats.org/drawingml/2006/main">
               <a:ext uri="{FF2B5EF4-FFF2-40B4-BE49-F238E27FC236}">
-                <a16:creationId xmlns:a16="http://schemas.microsoft.com/office/drawing/2014/main" id="{8A48C02F-1A5C-43F0-B824-E8684BA542F9}"/>
+                <a16:creationId xmlns:a16="http://schemas.microsoft.com/office/drawing/2014/main" id="{5C26FD20-A65A-41C7-A028-E209FF63E708}"/>
               </a:ext>
             </a:extLst>
           </p:cNvPr>
@@ -8799,7 +8799,7 @@
           <p:cNvPr id="11" name="">
             <a:extLst xmlns:a="http://schemas.openxmlformats.org/drawingml/2006/main">
               <a:ext uri="{FF2B5EF4-FFF2-40B4-BE49-F238E27FC236}">
-                <a16:creationId xmlns:a16="http://schemas.microsoft.com/office/drawing/2014/main" id="{8E9B26C5-91E7-4335-BE14-42F910F640EF}"/>
+                <a16:creationId xmlns:a16="http://schemas.microsoft.com/office/drawing/2014/main" id="{094A6570-097A-47CD-83A7-3D444903A0DD}"/>
               </a:ext>
             </a:extLst>
           </p:cNvPr>
@@ -8834,7 +8834,7 @@
           <p:cNvPr id="12" name="">
             <a:extLst xmlns:a="http://schemas.openxmlformats.org/drawingml/2006/main">
               <a:ext uri="{FF2B5EF4-FFF2-40B4-BE49-F238E27FC236}">
-                <a16:creationId xmlns:a16="http://schemas.microsoft.com/office/drawing/2014/main" id="{6C229A8C-BCD5-4406-A171-9240B3EEA97E}"/>
+                <a16:creationId xmlns:a16="http://schemas.microsoft.com/office/drawing/2014/main" id="{BA7480DC-7C5D-47F5-84FC-00B443A9943C}"/>
               </a:ext>
             </a:extLst>
           </p:cNvPr>
@@ -8892,7 +8892,7 @@
           <p:cNvPr id="13" name="">
             <a:extLst xmlns:a="http://schemas.openxmlformats.org/drawingml/2006/main">
               <a:ext uri="{FF2B5EF4-FFF2-40B4-BE49-F238E27FC236}">
-                <a16:creationId xmlns:a16="http://schemas.microsoft.com/office/drawing/2014/main" id="{DFCDB9B2-4BFF-4DD7-9227-FF54786A6DEB}"/>
+                <a16:creationId xmlns:a16="http://schemas.microsoft.com/office/drawing/2014/main" id="{3E26C35A-38A4-486D-B533-96F6A9597E06}"/>
               </a:ext>
             </a:extLst>
           </p:cNvPr>
@@ -8984,7 +8984,7 @@
           <p:cNvPr id="14" name="">
             <a:extLst xmlns:a="http://schemas.openxmlformats.org/drawingml/2006/main">
               <a:ext uri="{FF2B5EF4-FFF2-40B4-BE49-F238E27FC236}">
-                <a16:creationId xmlns:a16="http://schemas.microsoft.com/office/drawing/2014/main" id="{F7D8F76A-9C33-4B3B-9075-58752B0BB05E}"/>
+                <a16:creationId xmlns:a16="http://schemas.microsoft.com/office/drawing/2014/main" id="{6C1D5536-A27B-4C82-BEF0-EB5E77DC5BB3}"/>
               </a:ext>
             </a:extLst>
           </p:cNvPr>
@@ -9017,7 +9017,7 @@
           <p:cNvPr id="15" name="">
             <a:extLst xmlns:a="http://schemas.openxmlformats.org/drawingml/2006/main">
               <a:ext uri="{FF2B5EF4-FFF2-40B4-BE49-F238E27FC236}">
-                <a16:creationId xmlns:a16="http://schemas.microsoft.com/office/drawing/2014/main" id="{1EB861DE-8F79-4F1F-B582-DA05EB61C97B}"/>
+                <a16:creationId xmlns:a16="http://schemas.microsoft.com/office/drawing/2014/main" id="{64128235-5014-4F36-B8BE-8C132DDF0541}"/>
               </a:ext>
             </a:extLst>
           </p:cNvPr>
@@ -9052,7 +9052,7 @@
           <p:cNvPr id="16" name="">
             <a:extLst xmlns:a="http://schemas.openxmlformats.org/drawingml/2006/main">
               <a:ext uri="{FF2B5EF4-FFF2-40B4-BE49-F238E27FC236}">
-                <a16:creationId xmlns:a16="http://schemas.microsoft.com/office/drawing/2014/main" id="{60A4C605-6B77-49E0-B47F-0ED136AE5418}"/>
+                <a16:creationId xmlns:a16="http://schemas.microsoft.com/office/drawing/2014/main" id="{D730FDDA-A0EB-4DD7-B0EC-66B2E45E1758}"/>
               </a:ext>
             </a:extLst>
           </p:cNvPr>
@@ -9110,7 +9110,7 @@
           <p:cNvPr id="17" name="">
             <a:extLst xmlns:a="http://schemas.openxmlformats.org/drawingml/2006/main">
               <a:ext uri="{FF2B5EF4-FFF2-40B4-BE49-F238E27FC236}">
-                <a16:creationId xmlns:a16="http://schemas.microsoft.com/office/drawing/2014/main" id="{C0766B47-E238-4DD6-A832-AE8F285A6099}"/>
+                <a16:creationId xmlns:a16="http://schemas.microsoft.com/office/drawing/2014/main" id="{D5FD6A76-89D9-452C-BAA0-5073A38CD57B}"/>
               </a:ext>
             </a:extLst>
           </p:cNvPr>
@@ -9185,7 +9185,7 @@
           <p:cNvPr id="18" name="">
             <a:extLst xmlns:a="http://schemas.openxmlformats.org/drawingml/2006/main">
               <a:ext uri="{FF2B5EF4-FFF2-40B4-BE49-F238E27FC236}">
-                <a16:creationId xmlns:a16="http://schemas.microsoft.com/office/drawing/2014/main" id="{A1A6EB96-C0DA-4A1B-A098-8427A646509C}"/>
+                <a16:creationId xmlns:a16="http://schemas.microsoft.com/office/drawing/2014/main" id="{2422BBB5-CEC5-4900-B76B-443D9B1B4845}"/>
               </a:ext>
             </a:extLst>
           </p:cNvPr>
@@ -9218,7 +9218,7 @@
           <p:cNvPr id="19" name="">
             <a:extLst xmlns:a="http://schemas.openxmlformats.org/drawingml/2006/main">
               <a:ext uri="{FF2B5EF4-FFF2-40B4-BE49-F238E27FC236}">
-                <a16:creationId xmlns:a16="http://schemas.microsoft.com/office/drawing/2014/main" id="{0AFA7692-4A8C-457F-AA45-D0FDEDAA8A9E}"/>
+                <a16:creationId xmlns:a16="http://schemas.microsoft.com/office/drawing/2014/main" id="{4F48414E-516C-424E-85FB-6163E12C72C7}"/>
               </a:ext>
             </a:extLst>
           </p:cNvPr>
@@ -9253,7 +9253,7 @@
           <p:cNvPr id="20" name="">
             <a:extLst xmlns:a="http://schemas.openxmlformats.org/drawingml/2006/main">
               <a:ext uri="{FF2B5EF4-FFF2-40B4-BE49-F238E27FC236}">
-                <a16:creationId xmlns:a16="http://schemas.microsoft.com/office/drawing/2014/main" id="{718DA4F5-84B2-450D-977D-FFAA97596DD5}"/>
+                <a16:creationId xmlns:a16="http://schemas.microsoft.com/office/drawing/2014/main" id="{9A6DAACB-6986-4854-9FB6-AB94192E3973}"/>
               </a:ext>
             </a:extLst>
           </p:cNvPr>
@@ -9311,7 +9311,7 @@
           <p:cNvPr id="21" name="">
             <a:extLst xmlns:a="http://schemas.openxmlformats.org/drawingml/2006/main">
               <a:ext uri="{FF2B5EF4-FFF2-40B4-BE49-F238E27FC236}">
-                <a16:creationId xmlns:a16="http://schemas.microsoft.com/office/drawing/2014/main" id="{A27F5444-689C-48C9-8729-8C1A79820537}"/>
+                <a16:creationId xmlns:a16="http://schemas.microsoft.com/office/drawing/2014/main" id="{9748E59D-9059-417B-AC29-11A0B1ED42D7}"/>
               </a:ext>
             </a:extLst>
           </p:cNvPr>
@@ -9401,7 +9401,7 @@
     </p:spTree>
     <p:extLst>
       <p:ext uri="{BB962C8B-B14F-4D97-AF65-F5344CB8AC3E}">
-        <p14:creationId xmlns:p14="http://schemas.microsoft.com/office/powerpoint/2010/main" val="981926833"/>
+        <p14:creationId xmlns:p14="http://schemas.microsoft.com/office/powerpoint/2010/main" val="1097334607"/>
       </p:ext>
     </p:extLst>
   </p:cSld>
@@ -9414,7 +9414,7 @@
     <p:bg>
       <p:bgPr>
         <a:solidFill xmlns:a="http://schemas.openxmlformats.org/drawingml/2006/main">
-          <a:srgbClr val="0E1B3E"/>
+          <a:srgbClr val="070F26"/>
         </a:solidFill>
       </p:bgPr>
     </p:bg>
@@ -9432,7 +9432,7 @@
           <p:cNvPr id="1" name="">
             <a:extLst xmlns:a="http://schemas.openxmlformats.org/drawingml/2006/main">
               <a:ext uri="{FF2B5EF4-FFF2-40B4-BE49-F238E27FC236}">
-                <a16:creationId xmlns:a16="http://schemas.microsoft.com/office/drawing/2014/main" id="{FA04B289-A597-44C5-AE14-90AD4D7D8662}"/>
+                <a16:creationId xmlns:a16="http://schemas.microsoft.com/office/drawing/2014/main" id="{735FBA72-2653-46FB-8CED-D018A8F7376C}"/>
               </a:ext>
             </a:extLst>
           </p:cNvPr>
@@ -9450,7 +9450,7 @@
             <a:avLst/>
           </a:prstGeom>
           <a:solidFill xmlns:a="http://schemas.openxmlformats.org/drawingml/2006/main">
-            <a:srgbClr val="0E1B3E"/>
+            <a:srgbClr val="070F26"/>
           </a:solidFill>
           <a:ln xmlns:a="http://schemas.openxmlformats.org/drawingml/2006/main" w="0">
             <a:solidFill>
@@ -9471,7 +9471,7 @@
           <p:nvPr/>
         </p:nvPicPr>
         <p:blipFill>
-          <a:blip xmlns:r="http://schemas.openxmlformats.org/officeDocument/2006/relationships" xmlns:a="http://schemas.openxmlformats.org/drawingml/2006/main" r:embed="Rfe8063d937054865"/>
+          <a:blip xmlns:r="http://schemas.openxmlformats.org/officeDocument/2006/relationships" xmlns:a="http://schemas.openxmlformats.org/drawingml/2006/main" r:embed="Rfc25844e04ed4d9a"/>
           <a:stretch xmlns:a="http://schemas.openxmlformats.org/drawingml/2006/main"/>
         </p:blipFill>
         <p:spPr>
@@ -9489,7 +9489,7 @@
           <p:cNvPr id="3" name="">
             <a:extLst xmlns:a="http://schemas.openxmlformats.org/drawingml/2006/main">
               <a:ext uri="{FF2B5EF4-FFF2-40B4-BE49-F238E27FC236}">
-                <a16:creationId xmlns:a16="http://schemas.microsoft.com/office/drawing/2014/main" id="{3C140EF4-9137-4C95-91D0-717A5327652B}"/>
+                <a16:creationId xmlns:a16="http://schemas.microsoft.com/office/drawing/2014/main" id="{439AF1DA-FE9E-4C80-894B-4FB1B77F98AA}"/>
               </a:ext>
             </a:extLst>
           </p:cNvPr>
@@ -9547,7 +9547,7 @@
           <p:cNvPr id="4" name="">
             <a:extLst xmlns:a="http://schemas.openxmlformats.org/drawingml/2006/main">
               <a:ext uri="{FF2B5EF4-FFF2-40B4-BE49-F238E27FC236}">
-                <a16:creationId xmlns:a16="http://schemas.microsoft.com/office/drawing/2014/main" id="{9532E046-F33A-4B97-A77E-45D7184EFC93}"/>
+                <a16:creationId xmlns:a16="http://schemas.microsoft.com/office/drawing/2014/main" id="{EB764174-0B0D-4FFC-854D-717EB911E776}"/>
               </a:ext>
             </a:extLst>
           </p:cNvPr>
@@ -9605,7 +9605,7 @@
           <p:cNvPr id="5" name="">
             <a:extLst xmlns:a="http://schemas.openxmlformats.org/drawingml/2006/main">
               <a:ext uri="{FF2B5EF4-FFF2-40B4-BE49-F238E27FC236}">
-                <a16:creationId xmlns:a16="http://schemas.microsoft.com/office/drawing/2014/main" id="{0DA72053-1D7E-4EC5-8E5E-5D70552F3B9C}"/>
+                <a16:creationId xmlns:a16="http://schemas.microsoft.com/office/drawing/2014/main" id="{239F63ED-4FEA-441B-900F-81C6D86A9705}"/>
               </a:ext>
             </a:extLst>
           </p:cNvPr>
@@ -9663,7 +9663,7 @@
           <p:cNvPr id="6" name="">
             <a:extLst xmlns:a="http://schemas.openxmlformats.org/drawingml/2006/main">
               <a:ext uri="{FF2B5EF4-FFF2-40B4-BE49-F238E27FC236}">
-                <a16:creationId xmlns:a16="http://schemas.microsoft.com/office/drawing/2014/main" id="{EA5F7E72-4CFC-4F65-A74D-9A87F4ACB3A0}"/>
+                <a16:creationId xmlns:a16="http://schemas.microsoft.com/office/drawing/2014/main" id="{EE2BFE5B-A956-4255-85C5-EC173098176B}"/>
               </a:ext>
             </a:extLst>
           </p:cNvPr>
@@ -9725,13 +9725,13 @@
           <p:nvPr/>
         </p:nvPicPr>
         <p:blipFill>
-          <a:blip xmlns:r="http://schemas.openxmlformats.org/officeDocument/2006/relationships" xmlns:a="http://schemas.openxmlformats.org/drawingml/2006/main" r:embed="Rd97340025e3c4b5e"/>
+          <a:blip xmlns:r="http://schemas.openxmlformats.org/officeDocument/2006/relationships" xmlns:a="http://schemas.openxmlformats.org/drawingml/2006/main" r:embed="Rd9a76070fd9c47b8"/>
           <a:stretch xmlns:a="http://schemas.openxmlformats.org/drawingml/2006/main"/>
         </p:blipFill>
         <p:spPr>
           <a:xfrm xmlns:a="http://schemas.openxmlformats.org/drawingml/2006/main">
-            <a:off x="476250" y="1257300"/>
-            <a:ext cx="2667000" cy="4533900"/>
+            <a:off x="0" y="1746250"/>
+            <a:ext cx="2667000" cy="3556000"/>
           </a:xfrm>
           <a:prstGeom xmlns:a="http://schemas.openxmlformats.org/drawingml/2006/main" prst="rect">
             <a:avLst/>
@@ -9743,7 +9743,7 @@
           <p:cNvPr id="8" name="">
             <a:extLst xmlns:a="http://schemas.openxmlformats.org/drawingml/2006/main">
               <a:ext uri="{FF2B5EF4-FFF2-40B4-BE49-F238E27FC236}">
-                <a16:creationId xmlns:a16="http://schemas.microsoft.com/office/drawing/2014/main" id="{6471DFB3-FD02-429D-AF51-4826D509A02F}"/>
+                <a16:creationId xmlns:a16="http://schemas.microsoft.com/office/drawing/2014/main" id="{795C92FB-D93D-45EF-9F50-F7407F7BAB15}"/>
               </a:ext>
             </a:extLst>
           </p:cNvPr>
@@ -9801,7 +9801,7 @@
           <p:cNvPr id="9" name="">
             <a:extLst xmlns:a="http://schemas.openxmlformats.org/drawingml/2006/main">
               <a:ext uri="{FF2B5EF4-FFF2-40B4-BE49-F238E27FC236}">
-                <a16:creationId xmlns:a16="http://schemas.microsoft.com/office/drawing/2014/main" id="{AC721DC1-7C7A-49E1-AEE7-50D22829A4BC}"/>
+                <a16:creationId xmlns:a16="http://schemas.microsoft.com/office/drawing/2014/main" id="{DECD15ED-549E-4E22-BB14-31E843D0E1A6}"/>
               </a:ext>
             </a:extLst>
           </p:cNvPr>
@@ -9859,7 +9859,7 @@
           <p:cNvPr id="10" name="">
             <a:extLst xmlns:a="http://schemas.openxmlformats.org/drawingml/2006/main">
               <a:ext uri="{FF2B5EF4-FFF2-40B4-BE49-F238E27FC236}">
-                <a16:creationId xmlns:a16="http://schemas.microsoft.com/office/drawing/2014/main" id="{B3BB9549-4C7A-49AD-B4D4-7B3AEA3E1711}"/>
+                <a16:creationId xmlns:a16="http://schemas.microsoft.com/office/drawing/2014/main" id="{6CF18BE6-FA4B-4C78-BF69-8EA1C46163B0}"/>
               </a:ext>
             </a:extLst>
           </p:cNvPr>
@@ -9915,7 +9915,7 @@
     </p:spTree>
     <p:extLst>
       <p:ext uri="{BB962C8B-B14F-4D97-AF65-F5344CB8AC3E}">
-        <p14:creationId xmlns:p14="http://schemas.microsoft.com/office/powerpoint/2010/main" val="328099815"/>
+        <p14:creationId xmlns:p14="http://schemas.microsoft.com/office/powerpoint/2010/main" val="337910814"/>
       </p:ext>
     </p:extLst>
   </p:cSld>
@@ -9946,7 +9946,7 @@
           <p:cNvPr id="1" name="">
             <a:extLst xmlns:a="http://schemas.openxmlformats.org/drawingml/2006/main">
               <a:ext uri="{FF2B5EF4-FFF2-40B4-BE49-F238E27FC236}">
-                <a16:creationId xmlns:a16="http://schemas.microsoft.com/office/drawing/2014/main" id="{5049EDD7-C9B9-497B-80F7-400D6252B07A}"/>
+                <a16:creationId xmlns:a16="http://schemas.microsoft.com/office/drawing/2014/main" id="{D439FAAD-4F30-47A1-9290-C8E99DC7801E}"/>
               </a:ext>
             </a:extLst>
           </p:cNvPr>
@@ -9985,7 +9985,7 @@
           <p:nvPr/>
         </p:nvPicPr>
         <p:blipFill>
-          <a:blip xmlns:r="http://schemas.openxmlformats.org/officeDocument/2006/relationships" xmlns:a="http://schemas.openxmlformats.org/drawingml/2006/main" r:embed="Rb80d4647d18647eb"/>
+          <a:blip xmlns:r="http://schemas.openxmlformats.org/officeDocument/2006/relationships" xmlns:a="http://schemas.openxmlformats.org/drawingml/2006/main" r:embed="Rc01c5ae7cfcf4e64"/>
           <a:stretch xmlns:a="http://schemas.openxmlformats.org/drawingml/2006/main"/>
         </p:blipFill>
         <p:spPr>
@@ -10003,7 +10003,7 @@
           <p:cNvPr id="3" name="">
             <a:extLst xmlns:a="http://schemas.openxmlformats.org/drawingml/2006/main">
               <a:ext uri="{FF2B5EF4-FFF2-40B4-BE49-F238E27FC236}">
-                <a16:creationId xmlns:a16="http://schemas.microsoft.com/office/drawing/2014/main" id="{15CE1358-01C7-47C0-8E0A-EE7FBDB65004}"/>
+                <a16:creationId xmlns:a16="http://schemas.microsoft.com/office/drawing/2014/main" id="{8F20F1F1-D585-49C3-970A-1EA61C214B7E}"/>
               </a:ext>
             </a:extLst>
           </p:cNvPr>
@@ -10041,14 +10041,14 @@
             <a:pPr algn="r">
               <a:defRPr sz="825" b="1">
                 <a:solidFill>
-                  <a:srgbClr val="0E1B3E"/>
+                  <a:srgbClr val="070F26"/>
                 </a:solidFill>
               </a:defRPr>
             </a:pPr>
             <a:r>
               <a:rPr sz="825" b="1">
                 <a:solidFill>
-                  <a:srgbClr val="0E1B3E"/>
+                  <a:srgbClr val="070F26"/>
                 </a:solidFill>
               </a:rPr>
               <a:t>NTT DATA UNIVERSITY</a:t>
@@ -10061,7 +10061,7 @@
           <p:cNvPr id="4" name="">
             <a:extLst xmlns:a="http://schemas.openxmlformats.org/drawingml/2006/main">
               <a:ext uri="{FF2B5EF4-FFF2-40B4-BE49-F238E27FC236}">
-                <a16:creationId xmlns:a16="http://schemas.microsoft.com/office/drawing/2014/main" id="{F927C168-B2AD-4368-A1BC-55A7D1A8A72E}"/>
+                <a16:creationId xmlns:a16="http://schemas.microsoft.com/office/drawing/2014/main" id="{0FC37B00-1B32-4A8A-867B-6C56DEDB7951}"/>
               </a:ext>
             </a:extLst>
           </p:cNvPr>
@@ -10119,7 +10119,7 @@
           <p:cNvPr id="5" name="">
             <a:extLst xmlns:a="http://schemas.openxmlformats.org/drawingml/2006/main">
               <a:ext uri="{FF2B5EF4-FFF2-40B4-BE49-F238E27FC236}">
-                <a16:creationId xmlns:a16="http://schemas.microsoft.com/office/drawing/2014/main" id="{2AA4D801-0281-42F9-9733-8A0C6D164EB9}"/>
+                <a16:creationId xmlns:a16="http://schemas.microsoft.com/office/drawing/2014/main" id="{57DD1B08-FFBC-4071-9E31-11C27AC5AF6C}"/>
               </a:ext>
             </a:extLst>
           </p:cNvPr>
@@ -10177,7 +10177,7 @@
           <p:cNvPr id="6" name="">
             <a:extLst xmlns:a="http://schemas.openxmlformats.org/drawingml/2006/main">
               <a:ext uri="{FF2B5EF4-FFF2-40B4-BE49-F238E27FC236}">
-                <a16:creationId xmlns:a16="http://schemas.microsoft.com/office/drawing/2014/main" id="{E7C0B61B-2D75-48DE-954C-63146E4DBCEC}"/>
+                <a16:creationId xmlns:a16="http://schemas.microsoft.com/office/drawing/2014/main" id="{9131E19C-65DA-470C-85FD-B4E616AC026A}"/>
               </a:ext>
             </a:extLst>
           </p:cNvPr>
@@ -10215,14 +10215,14 @@
             <a:pPr algn="r">
               <a:defRPr sz="675" b="1">
                 <a:solidFill>
-                  <a:srgbClr val="0E1B3E"/>
+                  <a:srgbClr val="070F26"/>
                 </a:solidFill>
               </a:defRPr>
             </a:pPr>
             <a:r>
               <a:rPr sz="675" b="1">
                 <a:solidFill>
-                  <a:srgbClr val="0E1B3E"/>
+                  <a:srgbClr val="070F26"/>
                 </a:solidFill>
               </a:rPr>
               <a:t>NTT DATA UNIVERSITY</a:t>
@@ -10235,7 +10235,7 @@
           <p:cNvPr id="7" name="">
             <a:extLst xmlns:a="http://schemas.openxmlformats.org/drawingml/2006/main">
               <a:ext uri="{FF2B5EF4-FFF2-40B4-BE49-F238E27FC236}">
-                <a16:creationId xmlns:a16="http://schemas.microsoft.com/office/drawing/2014/main" id="{43EC6742-0D8B-487F-9D71-49A06F84D9B4}"/>
+                <a16:creationId xmlns:a16="http://schemas.microsoft.com/office/drawing/2014/main" id="{C7BE1EBE-B6E7-4DA7-957F-E682621B13AA}"/>
               </a:ext>
             </a:extLst>
           </p:cNvPr>
@@ -10293,7 +10293,7 @@
           <p:cNvPr id="8" name="">
             <a:extLst xmlns:a="http://schemas.openxmlformats.org/drawingml/2006/main">
               <a:ext uri="{FF2B5EF4-FFF2-40B4-BE49-F238E27FC236}">
-                <a16:creationId xmlns:a16="http://schemas.microsoft.com/office/drawing/2014/main" id="{E692EF58-B38A-4D82-9DA8-9468B93D32A3}"/>
+                <a16:creationId xmlns:a16="http://schemas.microsoft.com/office/drawing/2014/main" id="{C033DCD4-7B96-47C3-8A16-8D4F761F5D39}"/>
               </a:ext>
             </a:extLst>
           </p:cNvPr>
@@ -10331,14 +10331,14 @@
             <a:pPr algn="l">
               <a:defRPr sz="2400" b="0">
                 <a:solidFill>
-                  <a:srgbClr val="0E1B3E"/>
+                  <a:srgbClr val="070F26"/>
                 </a:solidFill>
               </a:defRPr>
             </a:pPr>
             <a:r>
               <a:rPr sz="2400" b="0">
                 <a:solidFill>
-                  <a:srgbClr val="0E1B3E"/>
+                  <a:srgbClr val="070F26"/>
                 </a:solidFill>
               </a:rPr>
               <a:t>Histórias frequentes — use como gancho</a:t>
@@ -10351,7 +10351,7 @@
           <p:cNvPr id="9" name="">
             <a:extLst xmlns:a="http://schemas.openxmlformats.org/drawingml/2006/main">
               <a:ext uri="{FF2B5EF4-FFF2-40B4-BE49-F238E27FC236}">
-                <a16:creationId xmlns:a16="http://schemas.microsoft.com/office/drawing/2014/main" id="{BB8EAAA5-88EA-44E3-9A1C-30BA9DA18FE9}"/>
+                <a16:creationId xmlns:a16="http://schemas.microsoft.com/office/drawing/2014/main" id="{08ECCD76-347D-498A-A8BB-E87E91AEBB2B}"/>
               </a:ext>
             </a:extLst>
           </p:cNvPr>
@@ -10409,7 +10409,7 @@
           <p:cNvPr id="10" name="">
             <a:extLst xmlns:a="http://schemas.openxmlformats.org/drawingml/2006/main">
               <a:ext uri="{FF2B5EF4-FFF2-40B4-BE49-F238E27FC236}">
-                <a16:creationId xmlns:a16="http://schemas.microsoft.com/office/drawing/2014/main" id="{20FA1D7A-BC38-44B6-9484-0AFDDB46C186}"/>
+                <a16:creationId xmlns:a16="http://schemas.microsoft.com/office/drawing/2014/main" id="{BF424251-681C-44DD-8FD8-F96E2418EAFD}"/>
               </a:ext>
             </a:extLst>
           </p:cNvPr>
@@ -10442,7 +10442,7 @@
           <p:cNvPr id="11" name="">
             <a:extLst xmlns:a="http://schemas.openxmlformats.org/drawingml/2006/main">
               <a:ext uri="{FF2B5EF4-FFF2-40B4-BE49-F238E27FC236}">
-                <a16:creationId xmlns:a16="http://schemas.microsoft.com/office/drawing/2014/main" id="{D6851CBC-CAE1-438C-912D-D25B371D85F8}"/>
+                <a16:creationId xmlns:a16="http://schemas.microsoft.com/office/drawing/2014/main" id="{764D2FC6-0BFA-4E17-B228-7EE94F7A6C74}"/>
               </a:ext>
             </a:extLst>
           </p:cNvPr>
@@ -10477,7 +10477,7 @@
           <p:cNvPr id="12" name="">
             <a:extLst xmlns:a="http://schemas.openxmlformats.org/drawingml/2006/main">
               <a:ext uri="{FF2B5EF4-FFF2-40B4-BE49-F238E27FC236}">
-                <a16:creationId xmlns:a16="http://schemas.microsoft.com/office/drawing/2014/main" id="{5464B239-812F-4A7F-881B-81E3CD2BB4C2}"/>
+                <a16:creationId xmlns:a16="http://schemas.microsoft.com/office/drawing/2014/main" id="{C03BF348-A80E-4792-B0FF-153A9CB83762}"/>
               </a:ext>
             </a:extLst>
           </p:cNvPr>
@@ -10535,7 +10535,7 @@
           <p:cNvPr id="13" name="">
             <a:extLst xmlns:a="http://schemas.openxmlformats.org/drawingml/2006/main">
               <a:ext uri="{FF2B5EF4-FFF2-40B4-BE49-F238E27FC236}">
-                <a16:creationId xmlns:a16="http://schemas.microsoft.com/office/drawing/2014/main" id="{36E2C70C-6E06-4935-BE6D-1A1DE267AE89}"/>
+                <a16:creationId xmlns:a16="http://schemas.microsoft.com/office/drawing/2014/main" id="{C43473D9-1332-41A8-A3FC-1BCCD860F2EC}"/>
               </a:ext>
             </a:extLst>
           </p:cNvPr>
@@ -10627,7 +10627,7 @@
           <p:cNvPr id="14" name="">
             <a:extLst xmlns:a="http://schemas.openxmlformats.org/drawingml/2006/main">
               <a:ext uri="{FF2B5EF4-FFF2-40B4-BE49-F238E27FC236}">
-                <a16:creationId xmlns:a16="http://schemas.microsoft.com/office/drawing/2014/main" id="{FE67112E-F1A0-492C-A763-8485756A9280}"/>
+                <a16:creationId xmlns:a16="http://schemas.microsoft.com/office/drawing/2014/main" id="{056693B7-A6DA-4EC6-BF56-C6E6A7ED983D}"/>
               </a:ext>
             </a:extLst>
           </p:cNvPr>
@@ -10660,7 +10660,7 @@
           <p:cNvPr id="15" name="">
             <a:extLst xmlns:a="http://schemas.openxmlformats.org/drawingml/2006/main">
               <a:ext uri="{FF2B5EF4-FFF2-40B4-BE49-F238E27FC236}">
-                <a16:creationId xmlns:a16="http://schemas.microsoft.com/office/drawing/2014/main" id="{957FCACA-0D8E-43C1-920A-0352660F878F}"/>
+                <a16:creationId xmlns:a16="http://schemas.microsoft.com/office/drawing/2014/main" id="{9DB6B94F-D482-4771-957D-D1B883A4D603}"/>
               </a:ext>
             </a:extLst>
           </p:cNvPr>
@@ -10695,7 +10695,7 @@
           <p:cNvPr id="16" name="">
             <a:extLst xmlns:a="http://schemas.openxmlformats.org/drawingml/2006/main">
               <a:ext uri="{FF2B5EF4-FFF2-40B4-BE49-F238E27FC236}">
-                <a16:creationId xmlns:a16="http://schemas.microsoft.com/office/drawing/2014/main" id="{68397527-172A-4486-9DDB-D64D4A790377}"/>
+                <a16:creationId xmlns:a16="http://schemas.microsoft.com/office/drawing/2014/main" id="{812BF141-9489-4F17-8DD2-27DC0944B5E8}"/>
               </a:ext>
             </a:extLst>
           </p:cNvPr>
@@ -10753,7 +10753,7 @@
           <p:cNvPr id="17" name="">
             <a:extLst xmlns:a="http://schemas.openxmlformats.org/drawingml/2006/main">
               <a:ext uri="{FF2B5EF4-FFF2-40B4-BE49-F238E27FC236}">
-                <a16:creationId xmlns:a16="http://schemas.microsoft.com/office/drawing/2014/main" id="{524F19F4-060D-42A7-92FC-8DA49D97F06C}"/>
+                <a16:creationId xmlns:a16="http://schemas.microsoft.com/office/drawing/2014/main" id="{4DE9D210-EDAF-40CC-85E4-F68EC1274F05}"/>
               </a:ext>
             </a:extLst>
           </p:cNvPr>
@@ -10845,7 +10845,7 @@
           <p:cNvPr id="18" name="">
             <a:extLst xmlns:a="http://schemas.openxmlformats.org/drawingml/2006/main">
               <a:ext uri="{FF2B5EF4-FFF2-40B4-BE49-F238E27FC236}">
-                <a16:creationId xmlns:a16="http://schemas.microsoft.com/office/drawing/2014/main" id="{320B4173-C685-4F37-8C94-0452EEC5CD8C}"/>
+                <a16:creationId xmlns:a16="http://schemas.microsoft.com/office/drawing/2014/main" id="{09411207-5A81-409C-B07A-9C0099449835}"/>
               </a:ext>
             </a:extLst>
           </p:cNvPr>
@@ -10878,7 +10878,7 @@
           <p:cNvPr id="19" name="">
             <a:extLst xmlns:a="http://schemas.openxmlformats.org/drawingml/2006/main">
               <a:ext uri="{FF2B5EF4-FFF2-40B4-BE49-F238E27FC236}">
-                <a16:creationId xmlns:a16="http://schemas.microsoft.com/office/drawing/2014/main" id="{6A92182E-1FDE-4053-800F-818A4C6D7235}"/>
+                <a16:creationId xmlns:a16="http://schemas.microsoft.com/office/drawing/2014/main" id="{26EE6002-42F1-43A2-8C07-670EC136C71D}"/>
               </a:ext>
             </a:extLst>
           </p:cNvPr>
@@ -10913,7 +10913,7 @@
           <p:cNvPr id="20" name="">
             <a:extLst xmlns:a="http://schemas.openxmlformats.org/drawingml/2006/main">
               <a:ext uri="{FF2B5EF4-FFF2-40B4-BE49-F238E27FC236}">
-                <a16:creationId xmlns:a16="http://schemas.microsoft.com/office/drawing/2014/main" id="{EE596159-E711-4D9B-9D86-D70028E6523C}"/>
+                <a16:creationId xmlns:a16="http://schemas.microsoft.com/office/drawing/2014/main" id="{AEE65270-EFEC-460A-B5DF-A48E7B9C6101}"/>
               </a:ext>
             </a:extLst>
           </p:cNvPr>
@@ -10971,7 +10971,7 @@
           <p:cNvPr id="21" name="">
             <a:extLst xmlns:a="http://schemas.openxmlformats.org/drawingml/2006/main">
               <a:ext uri="{FF2B5EF4-FFF2-40B4-BE49-F238E27FC236}">
-                <a16:creationId xmlns:a16="http://schemas.microsoft.com/office/drawing/2014/main" id="{6623D40E-B4D0-42D5-8703-C2889775BE10}"/>
+                <a16:creationId xmlns:a16="http://schemas.microsoft.com/office/drawing/2014/main" id="{DFBBDABA-7B70-47F9-B82C-95A4E78F61EF}"/>
               </a:ext>
             </a:extLst>
           </p:cNvPr>
@@ -11061,7 +11061,7 @@
     </p:spTree>
     <p:extLst>
       <p:ext uri="{BB962C8B-B14F-4D97-AF65-F5344CB8AC3E}">
-        <p14:creationId xmlns:p14="http://schemas.microsoft.com/office/powerpoint/2010/main" val="867677749"/>
+        <p14:creationId xmlns:p14="http://schemas.microsoft.com/office/powerpoint/2010/main" val="873938626"/>
       </p:ext>
     </p:extLst>
   </p:cSld>
@@ -11074,7 +11074,7 @@
     <p:bg>
       <p:bgPr>
         <a:solidFill xmlns:a="http://schemas.openxmlformats.org/drawingml/2006/main">
-          <a:srgbClr val="0E1B3E"/>
+          <a:srgbClr val="070F26"/>
         </a:solidFill>
       </p:bgPr>
     </p:bg>
@@ -11092,7 +11092,7 @@
           <p:cNvPr id="1" name="">
             <a:extLst xmlns:a="http://schemas.openxmlformats.org/drawingml/2006/main">
               <a:ext uri="{FF2B5EF4-FFF2-40B4-BE49-F238E27FC236}">
-                <a16:creationId xmlns:a16="http://schemas.microsoft.com/office/drawing/2014/main" id="{445395CB-E897-4B82-B40A-7FD4D08696B8}"/>
+                <a16:creationId xmlns:a16="http://schemas.microsoft.com/office/drawing/2014/main" id="{BD5A95CD-514D-4A5E-A6E1-1DD6845255B0}"/>
               </a:ext>
             </a:extLst>
           </p:cNvPr>
@@ -11110,7 +11110,7 @@
             <a:avLst/>
           </a:prstGeom>
           <a:solidFill xmlns:a="http://schemas.openxmlformats.org/drawingml/2006/main">
-            <a:srgbClr val="0E1B3E"/>
+            <a:srgbClr val="070F26"/>
           </a:solidFill>
           <a:ln xmlns:a="http://schemas.openxmlformats.org/drawingml/2006/main" w="0">
             <a:solidFill>
@@ -11131,7 +11131,7 @@
           <p:nvPr/>
         </p:nvPicPr>
         <p:blipFill>
-          <a:blip xmlns:r="http://schemas.openxmlformats.org/officeDocument/2006/relationships" xmlns:a="http://schemas.openxmlformats.org/drawingml/2006/main" r:embed="Rfc1f1c253bd64d4c"/>
+          <a:blip xmlns:r="http://schemas.openxmlformats.org/officeDocument/2006/relationships" xmlns:a="http://schemas.openxmlformats.org/drawingml/2006/main" r:embed="Re3b8bb999e5048c0"/>
           <a:stretch xmlns:a="http://schemas.openxmlformats.org/drawingml/2006/main"/>
         </p:blipFill>
         <p:spPr>
@@ -11149,7 +11149,7 @@
           <p:cNvPr id="3" name="">
             <a:extLst xmlns:a="http://schemas.openxmlformats.org/drawingml/2006/main">
               <a:ext uri="{FF2B5EF4-FFF2-40B4-BE49-F238E27FC236}">
-                <a16:creationId xmlns:a16="http://schemas.microsoft.com/office/drawing/2014/main" id="{CA161D2E-B638-459A-8DE4-C98CE6202409}"/>
+                <a16:creationId xmlns:a16="http://schemas.microsoft.com/office/drawing/2014/main" id="{E14E1F3A-998A-44BC-A010-5FF249D55565}"/>
               </a:ext>
             </a:extLst>
           </p:cNvPr>
@@ -11207,7 +11207,7 @@
           <p:cNvPr id="4" name="">
             <a:extLst xmlns:a="http://schemas.openxmlformats.org/drawingml/2006/main">
               <a:ext uri="{FF2B5EF4-FFF2-40B4-BE49-F238E27FC236}">
-                <a16:creationId xmlns:a16="http://schemas.microsoft.com/office/drawing/2014/main" id="{7B757CE6-3729-4672-A0AC-183D411B0BAD}"/>
+                <a16:creationId xmlns:a16="http://schemas.microsoft.com/office/drawing/2014/main" id="{4D7DC020-C43A-470E-A0F1-8BC2B42C6561}"/>
               </a:ext>
             </a:extLst>
           </p:cNvPr>
@@ -11265,7 +11265,7 @@
           <p:cNvPr id="5" name="">
             <a:extLst xmlns:a="http://schemas.openxmlformats.org/drawingml/2006/main">
               <a:ext uri="{FF2B5EF4-FFF2-40B4-BE49-F238E27FC236}">
-                <a16:creationId xmlns:a16="http://schemas.microsoft.com/office/drawing/2014/main" id="{D9AE520C-063A-4145-A4E4-EFDDFE8D75B8}"/>
+                <a16:creationId xmlns:a16="http://schemas.microsoft.com/office/drawing/2014/main" id="{CEFA3C6F-443C-4B32-81D6-3E354EB48B89}"/>
               </a:ext>
             </a:extLst>
           </p:cNvPr>
@@ -11323,7 +11323,7 @@
           <p:cNvPr id="6" name="">
             <a:extLst xmlns:a="http://schemas.openxmlformats.org/drawingml/2006/main">
               <a:ext uri="{FF2B5EF4-FFF2-40B4-BE49-F238E27FC236}">
-                <a16:creationId xmlns:a16="http://schemas.microsoft.com/office/drawing/2014/main" id="{ECED4E93-0FC7-4D90-B49A-5DADE44D3FCF}"/>
+                <a16:creationId xmlns:a16="http://schemas.microsoft.com/office/drawing/2014/main" id="{49543B29-25C5-4D8D-9D3A-C160F418F370}"/>
               </a:ext>
             </a:extLst>
           </p:cNvPr>
@@ -11385,13 +11385,13 @@
           <p:nvPr/>
         </p:nvPicPr>
         <p:blipFill>
-          <a:blip xmlns:r="http://schemas.openxmlformats.org/officeDocument/2006/relationships" xmlns:a="http://schemas.openxmlformats.org/drawingml/2006/main" r:embed="Rb3bb297ef1c54c80"/>
+          <a:blip xmlns:r="http://schemas.openxmlformats.org/officeDocument/2006/relationships" xmlns:a="http://schemas.openxmlformats.org/drawingml/2006/main" r:embed="R238542f6b58947bf"/>
           <a:stretch xmlns:a="http://schemas.openxmlformats.org/drawingml/2006/main"/>
         </p:blipFill>
         <p:spPr>
           <a:xfrm xmlns:a="http://schemas.openxmlformats.org/drawingml/2006/main">
-            <a:off x="476250" y="1257300"/>
-            <a:ext cx="2667000" cy="4533900"/>
+            <a:off x="0" y="1746250"/>
+            <a:ext cx="2667000" cy="3556000"/>
           </a:xfrm>
           <a:prstGeom xmlns:a="http://schemas.openxmlformats.org/drawingml/2006/main" prst="rect">
             <a:avLst/>
@@ -11403,7 +11403,7 @@
           <p:cNvPr id="8" name="">
             <a:extLst xmlns:a="http://schemas.openxmlformats.org/drawingml/2006/main">
               <a:ext uri="{FF2B5EF4-FFF2-40B4-BE49-F238E27FC236}">
-                <a16:creationId xmlns:a16="http://schemas.microsoft.com/office/drawing/2014/main" id="{ABF63E90-139E-4E80-B326-5FB57B4AB779}"/>
+                <a16:creationId xmlns:a16="http://schemas.microsoft.com/office/drawing/2014/main" id="{D5A7C954-56FB-4B34-AC78-DED6B00F522F}"/>
               </a:ext>
             </a:extLst>
           </p:cNvPr>
@@ -11461,7 +11461,7 @@
           <p:cNvPr id="9" name="">
             <a:extLst xmlns:a="http://schemas.openxmlformats.org/drawingml/2006/main">
               <a:ext uri="{FF2B5EF4-FFF2-40B4-BE49-F238E27FC236}">
-                <a16:creationId xmlns:a16="http://schemas.microsoft.com/office/drawing/2014/main" id="{D05E17BC-06B2-48A4-911F-27CDDC93E7B6}"/>
+                <a16:creationId xmlns:a16="http://schemas.microsoft.com/office/drawing/2014/main" id="{F41A2EB8-7D82-494D-B7F6-34D1F44F6FD5}"/>
               </a:ext>
             </a:extLst>
           </p:cNvPr>
@@ -11519,7 +11519,7 @@
           <p:cNvPr id="10" name="">
             <a:extLst xmlns:a="http://schemas.openxmlformats.org/drawingml/2006/main">
               <a:ext uri="{FF2B5EF4-FFF2-40B4-BE49-F238E27FC236}">
-                <a16:creationId xmlns:a16="http://schemas.microsoft.com/office/drawing/2014/main" id="{03386F00-83C3-4235-AD4D-741FA5DCC9CC}"/>
+                <a16:creationId xmlns:a16="http://schemas.microsoft.com/office/drawing/2014/main" id="{1CB1E9B2-7038-4307-B774-37AC8A553B29}"/>
               </a:ext>
             </a:extLst>
           </p:cNvPr>
@@ -11575,7 +11575,7 @@
     </p:spTree>
     <p:extLst>
       <p:ext uri="{BB962C8B-B14F-4D97-AF65-F5344CB8AC3E}">
-        <p14:creationId xmlns:p14="http://schemas.microsoft.com/office/powerpoint/2010/main" val="1636950914"/>
+        <p14:creationId xmlns:p14="http://schemas.microsoft.com/office/powerpoint/2010/main" val="1694512521"/>
       </p:ext>
     </p:extLst>
   </p:cSld>
@@ -11606,7 +11606,7 @@
           <p:cNvPr id="1" name="">
             <a:extLst xmlns:a="http://schemas.openxmlformats.org/drawingml/2006/main">
               <a:ext uri="{FF2B5EF4-FFF2-40B4-BE49-F238E27FC236}">
-                <a16:creationId xmlns:a16="http://schemas.microsoft.com/office/drawing/2014/main" id="{2EE36311-9C4C-495D-9C69-67C2BF66867A}"/>
+                <a16:creationId xmlns:a16="http://schemas.microsoft.com/office/drawing/2014/main" id="{14766BD5-0EF6-4FAF-8E85-E25A5E4A3D25}"/>
               </a:ext>
             </a:extLst>
           </p:cNvPr>
@@ -11645,7 +11645,7 @@
           <p:nvPr/>
         </p:nvPicPr>
         <p:blipFill>
-          <a:blip xmlns:r="http://schemas.openxmlformats.org/officeDocument/2006/relationships" xmlns:a="http://schemas.openxmlformats.org/drawingml/2006/main" r:embed="Rdf12de1383c44745"/>
+          <a:blip xmlns:r="http://schemas.openxmlformats.org/officeDocument/2006/relationships" xmlns:a="http://schemas.openxmlformats.org/drawingml/2006/main" r:embed="Rcd3568bc82fa49ae"/>
           <a:stretch xmlns:a="http://schemas.openxmlformats.org/drawingml/2006/main"/>
         </p:blipFill>
         <p:spPr>
@@ -11663,7 +11663,7 @@
           <p:cNvPr id="3" name="">
             <a:extLst xmlns:a="http://schemas.openxmlformats.org/drawingml/2006/main">
               <a:ext uri="{FF2B5EF4-FFF2-40B4-BE49-F238E27FC236}">
-                <a16:creationId xmlns:a16="http://schemas.microsoft.com/office/drawing/2014/main" id="{3D90B408-D1AB-4183-9788-8FE9708C7C7E}"/>
+                <a16:creationId xmlns:a16="http://schemas.microsoft.com/office/drawing/2014/main" id="{AE976DD6-5A02-45D6-87D9-07A6DDCC6A7A}"/>
               </a:ext>
             </a:extLst>
           </p:cNvPr>
@@ -11701,14 +11701,14 @@
             <a:pPr algn="r">
               <a:defRPr sz="825" b="1">
                 <a:solidFill>
-                  <a:srgbClr val="0E1B3E"/>
+                  <a:srgbClr val="070F26"/>
                 </a:solidFill>
               </a:defRPr>
             </a:pPr>
             <a:r>
               <a:rPr sz="825" b="1">
                 <a:solidFill>
-                  <a:srgbClr val="0E1B3E"/>
+                  <a:srgbClr val="070F26"/>
                 </a:solidFill>
               </a:rPr>
               <a:t>NTT DATA UNIVERSITY</a:t>
@@ -11721,7 +11721,7 @@
           <p:cNvPr id="4" name="">
             <a:extLst xmlns:a="http://schemas.openxmlformats.org/drawingml/2006/main">
               <a:ext uri="{FF2B5EF4-FFF2-40B4-BE49-F238E27FC236}">
-                <a16:creationId xmlns:a16="http://schemas.microsoft.com/office/drawing/2014/main" id="{2AAAB07E-D68B-4372-B4FA-CC2E73868769}"/>
+                <a16:creationId xmlns:a16="http://schemas.microsoft.com/office/drawing/2014/main" id="{7D008159-48F3-410E-8F78-6741404343A1}"/>
               </a:ext>
             </a:extLst>
           </p:cNvPr>
@@ -11779,7 +11779,7 @@
           <p:cNvPr id="5" name="">
             <a:extLst xmlns:a="http://schemas.openxmlformats.org/drawingml/2006/main">
               <a:ext uri="{FF2B5EF4-FFF2-40B4-BE49-F238E27FC236}">
-                <a16:creationId xmlns:a16="http://schemas.microsoft.com/office/drawing/2014/main" id="{A0A7CFDF-A9FC-4191-ADC0-9D439A9E5003}"/>
+                <a16:creationId xmlns:a16="http://schemas.microsoft.com/office/drawing/2014/main" id="{7A9B2F6E-6F64-4BC3-A02A-24A09D97840F}"/>
               </a:ext>
             </a:extLst>
           </p:cNvPr>
@@ -11837,7 +11837,7 @@
           <p:cNvPr id="6" name="">
             <a:extLst xmlns:a="http://schemas.openxmlformats.org/drawingml/2006/main">
               <a:ext uri="{FF2B5EF4-FFF2-40B4-BE49-F238E27FC236}">
-                <a16:creationId xmlns:a16="http://schemas.microsoft.com/office/drawing/2014/main" id="{F0F7450D-1E4E-4151-9894-2065B57A7C82}"/>
+                <a16:creationId xmlns:a16="http://schemas.microsoft.com/office/drawing/2014/main" id="{A3DEEFAE-7B54-4AD9-9F57-6FFDC343E171}"/>
               </a:ext>
             </a:extLst>
           </p:cNvPr>
@@ -11875,14 +11875,14 @@
             <a:pPr algn="r">
               <a:defRPr sz="675" b="1">
                 <a:solidFill>
-                  <a:srgbClr val="0E1B3E"/>
+                  <a:srgbClr val="070F26"/>
                 </a:solidFill>
               </a:defRPr>
             </a:pPr>
             <a:r>
               <a:rPr sz="675" b="1">
                 <a:solidFill>
-                  <a:srgbClr val="0E1B3E"/>
+                  <a:srgbClr val="070F26"/>
                 </a:solidFill>
               </a:rPr>
               <a:t>NTT DATA UNIVERSITY</a:t>
@@ -11895,7 +11895,7 @@
           <p:cNvPr id="7" name="">
             <a:extLst xmlns:a="http://schemas.openxmlformats.org/drawingml/2006/main">
               <a:ext uri="{FF2B5EF4-FFF2-40B4-BE49-F238E27FC236}">
-                <a16:creationId xmlns:a16="http://schemas.microsoft.com/office/drawing/2014/main" id="{4122C3A5-6086-4557-8917-69D8C864C73F}"/>
+                <a16:creationId xmlns:a16="http://schemas.microsoft.com/office/drawing/2014/main" id="{CEC518D0-2F5E-4FF6-92E5-0F482FCD5BEE}"/>
               </a:ext>
             </a:extLst>
           </p:cNvPr>
@@ -11953,7 +11953,7 @@
           <p:cNvPr id="8" name="">
             <a:extLst xmlns:a="http://schemas.openxmlformats.org/drawingml/2006/main">
               <a:ext uri="{FF2B5EF4-FFF2-40B4-BE49-F238E27FC236}">
-                <a16:creationId xmlns:a16="http://schemas.microsoft.com/office/drawing/2014/main" id="{C513A1FD-8F00-4A44-9B44-1543BEBE5954}"/>
+                <a16:creationId xmlns:a16="http://schemas.microsoft.com/office/drawing/2014/main" id="{EF3D8560-6A0D-4A3C-BD4B-28CC9B7CACA7}"/>
               </a:ext>
             </a:extLst>
           </p:cNvPr>
@@ -11991,14 +11991,14 @@
             <a:pPr algn="l">
               <a:defRPr sz="2400" b="0">
                 <a:solidFill>
-                  <a:srgbClr val="0E1B3E"/>
+                  <a:srgbClr val="070F26"/>
                 </a:solidFill>
               </a:defRPr>
             </a:pPr>
             <a:r>
               <a:rPr sz="2400" b="0">
                 <a:solidFill>
-                  <a:srgbClr val="0E1B3E"/>
+                  <a:srgbClr val="070F26"/>
                 </a:solidFill>
               </a:rPr>
               <a:t>Vocabulário comum para classificar problemas</a:t>
@@ -12011,7 +12011,7 @@
           <p:cNvPr id="9" name="">
             <a:extLst xmlns:a="http://schemas.openxmlformats.org/drawingml/2006/main">
               <a:ext uri="{FF2B5EF4-FFF2-40B4-BE49-F238E27FC236}">
-                <a16:creationId xmlns:a16="http://schemas.microsoft.com/office/drawing/2014/main" id="{20CDBBB0-DDFF-4D08-9517-ACEBE9121C01}"/>
+                <a16:creationId xmlns:a16="http://schemas.microsoft.com/office/drawing/2014/main" id="{E7EBA295-2F4B-49C5-99C4-443E40A331D2}"/>
               </a:ext>
             </a:extLst>
           </p:cNvPr>
@@ -12069,7 +12069,7 @@
           <p:cNvPr id="10" name="">
             <a:extLst xmlns:a="http://schemas.openxmlformats.org/drawingml/2006/main">
               <a:ext uri="{FF2B5EF4-FFF2-40B4-BE49-F238E27FC236}">
-                <a16:creationId xmlns:a16="http://schemas.microsoft.com/office/drawing/2014/main" id="{70FC49F8-B4FB-4CA7-B455-A70A5B42E9BF}"/>
+                <a16:creationId xmlns:a16="http://schemas.microsoft.com/office/drawing/2014/main" id="{622B671B-979C-43DE-8A1A-DB92E079C761}"/>
               </a:ext>
             </a:extLst>
           </p:cNvPr>
@@ -12102,7 +12102,7 @@
           <p:cNvPr id="11" name="">
             <a:extLst xmlns:a="http://schemas.openxmlformats.org/drawingml/2006/main">
               <a:ext uri="{FF2B5EF4-FFF2-40B4-BE49-F238E27FC236}">
-                <a16:creationId xmlns:a16="http://schemas.microsoft.com/office/drawing/2014/main" id="{EACE18FB-5AF2-4CFA-BBF7-3BE51BEDB398}"/>
+                <a16:creationId xmlns:a16="http://schemas.microsoft.com/office/drawing/2014/main" id="{90B20F6C-FF4B-4FBC-B3BA-9C6D7EF94D94}"/>
               </a:ext>
             </a:extLst>
           </p:cNvPr>
@@ -12137,7 +12137,7 @@
           <p:cNvPr id="12" name="">
             <a:extLst xmlns:a="http://schemas.openxmlformats.org/drawingml/2006/main">
               <a:ext uri="{FF2B5EF4-FFF2-40B4-BE49-F238E27FC236}">
-                <a16:creationId xmlns:a16="http://schemas.microsoft.com/office/drawing/2014/main" id="{28CEF1F7-D11D-42AB-896C-81CEF259DFAF}"/>
+                <a16:creationId xmlns:a16="http://schemas.microsoft.com/office/drawing/2014/main" id="{B9F30790-9EA5-490D-978D-1786DC0A5368}"/>
               </a:ext>
             </a:extLst>
           </p:cNvPr>
@@ -12195,7 +12195,7 @@
           <p:cNvPr id="13" name="">
             <a:extLst xmlns:a="http://schemas.openxmlformats.org/drawingml/2006/main">
               <a:ext uri="{FF2B5EF4-FFF2-40B4-BE49-F238E27FC236}">
-                <a16:creationId xmlns:a16="http://schemas.microsoft.com/office/drawing/2014/main" id="{C1D7F7EE-6AA5-41D7-BB6B-AF62BA802DE3}"/>
+                <a16:creationId xmlns:a16="http://schemas.microsoft.com/office/drawing/2014/main" id="{8D9EE7BE-DBB4-4C6F-85E5-7F7FD09CF304}"/>
               </a:ext>
             </a:extLst>
           </p:cNvPr>
@@ -12270,7 +12270,7 @@
           <p:cNvPr id="14" name="">
             <a:extLst xmlns:a="http://schemas.openxmlformats.org/drawingml/2006/main">
               <a:ext uri="{FF2B5EF4-FFF2-40B4-BE49-F238E27FC236}">
-                <a16:creationId xmlns:a16="http://schemas.microsoft.com/office/drawing/2014/main" id="{67B059F3-D646-4993-A173-1F8EED36724C}"/>
+                <a16:creationId xmlns:a16="http://schemas.microsoft.com/office/drawing/2014/main" id="{E92F9009-B2CC-4950-A9F9-95B1B6C8E9BE}"/>
               </a:ext>
             </a:extLst>
           </p:cNvPr>
@@ -12303,7 +12303,7 @@
           <p:cNvPr id="15" name="">
             <a:extLst xmlns:a="http://schemas.openxmlformats.org/drawingml/2006/main">
               <a:ext uri="{FF2B5EF4-FFF2-40B4-BE49-F238E27FC236}">
-                <a16:creationId xmlns:a16="http://schemas.microsoft.com/office/drawing/2014/main" id="{4FABF976-9BFB-4D41-B9B8-666FE87B561A}"/>
+                <a16:creationId xmlns:a16="http://schemas.microsoft.com/office/drawing/2014/main" id="{186BF9CF-9775-4EDE-B7AD-7C3A14B616EE}"/>
               </a:ext>
             </a:extLst>
           </p:cNvPr>
@@ -12338,7 +12338,7 @@
           <p:cNvPr id="16" name="">
             <a:extLst xmlns:a="http://schemas.openxmlformats.org/drawingml/2006/main">
               <a:ext uri="{FF2B5EF4-FFF2-40B4-BE49-F238E27FC236}">
-                <a16:creationId xmlns:a16="http://schemas.microsoft.com/office/drawing/2014/main" id="{ADEB3C06-B17B-4B31-BC8E-B9A1D153F272}"/>
+                <a16:creationId xmlns:a16="http://schemas.microsoft.com/office/drawing/2014/main" id="{EED26B9C-891D-470E-B544-8F38C928E3A5}"/>
               </a:ext>
             </a:extLst>
           </p:cNvPr>
@@ -12396,7 +12396,7 @@
           <p:cNvPr id="17" name="">
             <a:extLst xmlns:a="http://schemas.openxmlformats.org/drawingml/2006/main">
               <a:ext uri="{FF2B5EF4-FFF2-40B4-BE49-F238E27FC236}">
-                <a16:creationId xmlns:a16="http://schemas.microsoft.com/office/drawing/2014/main" id="{F873C975-5A77-4D65-9B08-03564E18C067}"/>
+                <a16:creationId xmlns:a16="http://schemas.microsoft.com/office/drawing/2014/main" id="{6BC52872-B9E3-4517-8BC5-07E1829BF73C}"/>
               </a:ext>
             </a:extLst>
           </p:cNvPr>
@@ -12471,7 +12471,7 @@
           <p:cNvPr id="18" name="">
             <a:extLst xmlns:a="http://schemas.openxmlformats.org/drawingml/2006/main">
               <a:ext uri="{FF2B5EF4-FFF2-40B4-BE49-F238E27FC236}">
-                <a16:creationId xmlns:a16="http://schemas.microsoft.com/office/drawing/2014/main" id="{9C5DD525-AAF0-49C0-B5AD-FA2FFB0EDB12}"/>
+                <a16:creationId xmlns:a16="http://schemas.microsoft.com/office/drawing/2014/main" id="{77CEB1E2-584F-41DF-8C3D-4B1FAC039686}"/>
               </a:ext>
             </a:extLst>
           </p:cNvPr>
@@ -12504,7 +12504,7 @@
           <p:cNvPr id="19" name="">
             <a:extLst xmlns:a="http://schemas.openxmlformats.org/drawingml/2006/main">
               <a:ext uri="{FF2B5EF4-FFF2-40B4-BE49-F238E27FC236}">
-                <a16:creationId xmlns:a16="http://schemas.microsoft.com/office/drawing/2014/main" id="{38C93C50-68FF-46FE-B409-FDC0B2E55D9C}"/>
+                <a16:creationId xmlns:a16="http://schemas.microsoft.com/office/drawing/2014/main" id="{824451EB-4B16-4411-AA77-43E4384CEBAC}"/>
               </a:ext>
             </a:extLst>
           </p:cNvPr>
@@ -12539,7 +12539,7 @@
           <p:cNvPr id="20" name="">
             <a:extLst xmlns:a="http://schemas.openxmlformats.org/drawingml/2006/main">
               <a:ext uri="{FF2B5EF4-FFF2-40B4-BE49-F238E27FC236}">
-                <a16:creationId xmlns:a16="http://schemas.microsoft.com/office/drawing/2014/main" id="{B6F24655-2946-49E0-9BFA-D64BD309AF44}"/>
+                <a16:creationId xmlns:a16="http://schemas.microsoft.com/office/drawing/2014/main" id="{BD764530-E9AC-4D49-A6EC-F8DB8DF1E556}"/>
               </a:ext>
             </a:extLst>
           </p:cNvPr>
@@ -12597,7 +12597,7 @@
           <p:cNvPr id="21" name="">
             <a:extLst xmlns:a="http://schemas.openxmlformats.org/drawingml/2006/main">
               <a:ext uri="{FF2B5EF4-FFF2-40B4-BE49-F238E27FC236}">
-                <a16:creationId xmlns:a16="http://schemas.microsoft.com/office/drawing/2014/main" id="{C197C8DA-CA6B-45EE-B84A-79801D989476}"/>
+                <a16:creationId xmlns:a16="http://schemas.microsoft.com/office/drawing/2014/main" id="{0417941C-4CF4-450A-A6D2-F2003A85638F}"/>
               </a:ext>
             </a:extLst>
           </p:cNvPr>
@@ -12672,7 +12672,7 @@
           <p:cNvPr id="22" name="">
             <a:extLst xmlns:a="http://schemas.openxmlformats.org/drawingml/2006/main">
               <a:ext uri="{FF2B5EF4-FFF2-40B4-BE49-F238E27FC236}">
-                <a16:creationId xmlns:a16="http://schemas.microsoft.com/office/drawing/2014/main" id="{35B2A6EC-2D94-467C-B30D-5A1F17B5BC67}"/>
+                <a16:creationId xmlns:a16="http://schemas.microsoft.com/office/drawing/2014/main" id="{8C9CF63C-9953-493C-B2A1-51FA9E8C057F}"/>
               </a:ext>
             </a:extLst>
           </p:cNvPr>
@@ -12705,7 +12705,7 @@
           <p:cNvPr id="23" name="">
             <a:extLst xmlns:a="http://schemas.openxmlformats.org/drawingml/2006/main">
               <a:ext uri="{FF2B5EF4-FFF2-40B4-BE49-F238E27FC236}">
-                <a16:creationId xmlns:a16="http://schemas.microsoft.com/office/drawing/2014/main" id="{78124409-A1CA-4BB5-92F4-5D69510CA578}"/>
+                <a16:creationId xmlns:a16="http://schemas.microsoft.com/office/drawing/2014/main" id="{BB26A88C-87B7-4710-9DAB-A17BCD78AEB1}"/>
               </a:ext>
             </a:extLst>
           </p:cNvPr>
@@ -12740,7 +12740,7 @@
           <p:cNvPr id="24" name="">
             <a:extLst xmlns:a="http://schemas.openxmlformats.org/drawingml/2006/main">
               <a:ext uri="{FF2B5EF4-FFF2-40B4-BE49-F238E27FC236}">
-                <a16:creationId xmlns:a16="http://schemas.microsoft.com/office/drawing/2014/main" id="{8704382D-A486-47CF-88AD-4E5FCC46AEC6}"/>
+                <a16:creationId xmlns:a16="http://schemas.microsoft.com/office/drawing/2014/main" id="{53636986-C843-47D9-9D01-BC3D464DA899}"/>
               </a:ext>
             </a:extLst>
           </p:cNvPr>
@@ -12798,7 +12798,7 @@
           <p:cNvPr id="25" name="">
             <a:extLst xmlns:a="http://schemas.openxmlformats.org/drawingml/2006/main">
               <a:ext uri="{FF2B5EF4-FFF2-40B4-BE49-F238E27FC236}">
-                <a16:creationId xmlns:a16="http://schemas.microsoft.com/office/drawing/2014/main" id="{0EADE06F-55C9-4075-AFBF-FC5650CA1AE0}"/>
+                <a16:creationId xmlns:a16="http://schemas.microsoft.com/office/drawing/2014/main" id="{644AC575-7CFB-4564-9159-CE554FD8892B}"/>
               </a:ext>
             </a:extLst>
           </p:cNvPr>
@@ -12871,7 +12871,7 @@
     </p:spTree>
     <p:extLst>
       <p:ext uri="{BB962C8B-B14F-4D97-AF65-F5344CB8AC3E}">
-        <p14:creationId xmlns:p14="http://schemas.microsoft.com/office/powerpoint/2010/main" val="1254320945"/>
+        <p14:creationId xmlns:p14="http://schemas.microsoft.com/office/powerpoint/2010/main" val="306766726"/>
       </p:ext>
     </p:extLst>
   </p:cSld>
@@ -12902,7 +12902,7 @@
           <p:cNvPr id="1" name="">
             <a:extLst xmlns:a="http://schemas.openxmlformats.org/drawingml/2006/main">
               <a:ext uri="{FF2B5EF4-FFF2-40B4-BE49-F238E27FC236}">
-                <a16:creationId xmlns:a16="http://schemas.microsoft.com/office/drawing/2014/main" id="{000DB930-D1E8-447C-B57A-6A824871C86A}"/>
+                <a16:creationId xmlns:a16="http://schemas.microsoft.com/office/drawing/2014/main" id="{BA7C7D27-B2B4-44E4-9E29-3F42DCDC53FE}"/>
               </a:ext>
             </a:extLst>
           </p:cNvPr>
@@ -12941,7 +12941,7 @@
           <p:nvPr/>
         </p:nvPicPr>
         <p:blipFill>
-          <a:blip xmlns:r="http://schemas.openxmlformats.org/officeDocument/2006/relationships" xmlns:a="http://schemas.openxmlformats.org/drawingml/2006/main" r:embed="R8ce226e785a74b3e"/>
+          <a:blip xmlns:r="http://schemas.openxmlformats.org/officeDocument/2006/relationships" xmlns:a="http://schemas.openxmlformats.org/drawingml/2006/main" r:embed="R6eb9bf51ddd9400b"/>
           <a:stretch xmlns:a="http://schemas.openxmlformats.org/drawingml/2006/main"/>
         </p:blipFill>
         <p:spPr>
@@ -12959,7 +12959,7 @@
           <p:cNvPr id="3" name="">
             <a:extLst xmlns:a="http://schemas.openxmlformats.org/drawingml/2006/main">
               <a:ext uri="{FF2B5EF4-FFF2-40B4-BE49-F238E27FC236}">
-                <a16:creationId xmlns:a16="http://schemas.microsoft.com/office/drawing/2014/main" id="{59427630-DC6F-495D-848E-363ACDDD11F2}"/>
+                <a16:creationId xmlns:a16="http://schemas.microsoft.com/office/drawing/2014/main" id="{AEB0D65E-4612-414C-8FF8-A29A93BEBD3A}"/>
               </a:ext>
             </a:extLst>
           </p:cNvPr>
@@ -12997,14 +12997,14 @@
             <a:pPr algn="r">
               <a:defRPr sz="825" b="1">
                 <a:solidFill>
-                  <a:srgbClr val="0E1B3E"/>
+                  <a:srgbClr val="070F26"/>
                 </a:solidFill>
               </a:defRPr>
             </a:pPr>
             <a:r>
               <a:rPr sz="825" b="1">
                 <a:solidFill>
-                  <a:srgbClr val="0E1B3E"/>
+                  <a:srgbClr val="070F26"/>
                 </a:solidFill>
               </a:rPr>
               <a:t>NTT DATA UNIVERSITY</a:t>
@@ -13017,7 +13017,7 @@
           <p:cNvPr id="4" name="">
             <a:extLst xmlns:a="http://schemas.openxmlformats.org/drawingml/2006/main">
               <a:ext uri="{FF2B5EF4-FFF2-40B4-BE49-F238E27FC236}">
-                <a16:creationId xmlns:a16="http://schemas.microsoft.com/office/drawing/2014/main" id="{D162821D-7403-47AF-8BA3-513A4843082D}"/>
+                <a16:creationId xmlns:a16="http://schemas.microsoft.com/office/drawing/2014/main" id="{5D114694-D952-4263-9539-C984F03E44D3}"/>
               </a:ext>
             </a:extLst>
           </p:cNvPr>
@@ -13075,7 +13075,7 @@
           <p:cNvPr id="5" name="">
             <a:extLst xmlns:a="http://schemas.openxmlformats.org/drawingml/2006/main">
               <a:ext uri="{FF2B5EF4-FFF2-40B4-BE49-F238E27FC236}">
-                <a16:creationId xmlns:a16="http://schemas.microsoft.com/office/drawing/2014/main" id="{2B8E01E1-2B62-44E2-845B-13B93905E75B}"/>
+                <a16:creationId xmlns:a16="http://schemas.microsoft.com/office/drawing/2014/main" id="{18651709-7468-43C0-9BF5-C41EFBB7F85B}"/>
               </a:ext>
             </a:extLst>
           </p:cNvPr>
@@ -13133,7 +13133,7 @@
           <p:cNvPr id="6" name="">
             <a:extLst xmlns:a="http://schemas.openxmlformats.org/drawingml/2006/main">
               <a:ext uri="{FF2B5EF4-FFF2-40B4-BE49-F238E27FC236}">
-                <a16:creationId xmlns:a16="http://schemas.microsoft.com/office/drawing/2014/main" id="{EF261745-0C6C-4534-BA2A-950401158E99}"/>
+                <a16:creationId xmlns:a16="http://schemas.microsoft.com/office/drawing/2014/main" id="{4FB138A5-053E-43A8-BCC1-53F787FE5239}"/>
               </a:ext>
             </a:extLst>
           </p:cNvPr>
@@ -13171,14 +13171,14 @@
             <a:pPr algn="r">
               <a:defRPr sz="675" b="1">
                 <a:solidFill>
-                  <a:srgbClr val="0E1B3E"/>
+                  <a:srgbClr val="070F26"/>
                 </a:solidFill>
               </a:defRPr>
             </a:pPr>
             <a:r>
               <a:rPr sz="675" b="1">
                 <a:solidFill>
-                  <a:srgbClr val="0E1B3E"/>
+                  <a:srgbClr val="070F26"/>
                 </a:solidFill>
               </a:rPr>
               <a:t>NTT DATA UNIVERSITY</a:t>
@@ -13191,7 +13191,7 @@
           <p:cNvPr id="7" name="">
             <a:extLst xmlns:a="http://schemas.openxmlformats.org/drawingml/2006/main">
               <a:ext uri="{FF2B5EF4-FFF2-40B4-BE49-F238E27FC236}">
-                <a16:creationId xmlns:a16="http://schemas.microsoft.com/office/drawing/2014/main" id="{64F32BCD-700D-44B2-943F-D2AEAEBB2452}"/>
+                <a16:creationId xmlns:a16="http://schemas.microsoft.com/office/drawing/2014/main" id="{0D681C6A-C02E-4D19-B98E-FBB4A1F4F5F8}"/>
               </a:ext>
             </a:extLst>
           </p:cNvPr>
@@ -13249,7 +13249,7 @@
           <p:cNvPr id="8" name="">
             <a:extLst xmlns:a="http://schemas.openxmlformats.org/drawingml/2006/main">
               <a:ext uri="{FF2B5EF4-FFF2-40B4-BE49-F238E27FC236}">
-                <a16:creationId xmlns:a16="http://schemas.microsoft.com/office/drawing/2014/main" id="{5877B48E-0156-4A8B-943F-84C87CBFE731}"/>
+                <a16:creationId xmlns:a16="http://schemas.microsoft.com/office/drawing/2014/main" id="{31981A9D-10B4-4A8F-9051-AD5992971A4C}"/>
               </a:ext>
             </a:extLst>
           </p:cNvPr>
@@ -13287,14 +13287,14 @@
             <a:pPr algn="l">
               <a:defRPr sz="2400" b="0">
                 <a:solidFill>
-                  <a:srgbClr val="0E1B3E"/>
+                  <a:srgbClr val="070F26"/>
                 </a:solidFill>
               </a:defRPr>
             </a:pPr>
             <a:r>
               <a:rPr sz="2400" b="0">
                 <a:solidFill>
-                  <a:srgbClr val="0E1B3E"/>
+                  <a:srgbClr val="070F26"/>
                 </a:solidFill>
               </a:rPr>
               <a:t>produto_id = 999 — qual dimensão viola?</a:t>
@@ -13307,7 +13307,7 @@
           <p:cNvPr id="9" name="">
             <a:extLst xmlns:a="http://schemas.openxmlformats.org/drawingml/2006/main">
               <a:ext uri="{FF2B5EF4-FFF2-40B4-BE49-F238E27FC236}">
-                <a16:creationId xmlns:a16="http://schemas.microsoft.com/office/drawing/2014/main" id="{0C4521CD-349F-4099-A59D-6F597D85DD0A}"/>
+                <a16:creationId xmlns:a16="http://schemas.microsoft.com/office/drawing/2014/main" id="{AA3C100A-3423-46C4-A709-852C894B3CF2}"/>
               </a:ext>
             </a:extLst>
           </p:cNvPr>
@@ -13365,7 +13365,7 @@
           <p:cNvPr id="10" name="">
             <a:extLst xmlns:a="http://schemas.openxmlformats.org/drawingml/2006/main">
               <a:ext uri="{FF2B5EF4-FFF2-40B4-BE49-F238E27FC236}">
-                <a16:creationId xmlns:a16="http://schemas.microsoft.com/office/drawing/2014/main" id="{0D5CE67F-D883-4DE9-BD84-D67F71331B72}"/>
+                <a16:creationId xmlns:a16="http://schemas.microsoft.com/office/drawing/2014/main" id="{245CB357-03B7-4F44-A5D4-37914CE1ADF2}"/>
               </a:ext>
             </a:extLst>
           </p:cNvPr>
@@ -13398,7 +13398,7 @@
           <p:cNvPr id="11" name="">
             <a:extLst xmlns:a="http://schemas.openxmlformats.org/drawingml/2006/main">
               <a:ext uri="{FF2B5EF4-FFF2-40B4-BE49-F238E27FC236}">
-                <a16:creationId xmlns:a16="http://schemas.microsoft.com/office/drawing/2014/main" id="{525792D3-0244-44F4-8B4C-BA77628896AB}"/>
+                <a16:creationId xmlns:a16="http://schemas.microsoft.com/office/drawing/2014/main" id="{30055A13-921B-4E5B-840F-3A1EACD88698}"/>
               </a:ext>
             </a:extLst>
           </p:cNvPr>
@@ -13433,7 +13433,7 @@
           <p:cNvPr id="12" name="">
             <a:extLst xmlns:a="http://schemas.openxmlformats.org/drawingml/2006/main">
               <a:ext uri="{FF2B5EF4-FFF2-40B4-BE49-F238E27FC236}">
-                <a16:creationId xmlns:a16="http://schemas.microsoft.com/office/drawing/2014/main" id="{29898F6E-C744-41CA-9F8E-CBFBC052AC71}"/>
+                <a16:creationId xmlns:a16="http://schemas.microsoft.com/office/drawing/2014/main" id="{0BFAF708-94B7-43DB-82B9-E19C2738A756}"/>
               </a:ext>
             </a:extLst>
           </p:cNvPr>
@@ -13491,7 +13491,7 @@
           <p:cNvPr id="13" name="">
             <a:extLst xmlns:a="http://schemas.openxmlformats.org/drawingml/2006/main">
               <a:ext uri="{FF2B5EF4-FFF2-40B4-BE49-F238E27FC236}">
-                <a16:creationId xmlns:a16="http://schemas.microsoft.com/office/drawing/2014/main" id="{7D4C135F-9BE3-4C9D-8B05-A2A4FFAC6094}"/>
+                <a16:creationId xmlns:a16="http://schemas.microsoft.com/office/drawing/2014/main" id="{1B7CE53E-40E7-4BC6-8377-41314037577D}"/>
               </a:ext>
             </a:extLst>
           </p:cNvPr>
@@ -13583,7 +13583,7 @@
           <p:cNvPr id="14" name="">
             <a:extLst xmlns:a="http://schemas.openxmlformats.org/drawingml/2006/main">
               <a:ext uri="{FF2B5EF4-FFF2-40B4-BE49-F238E27FC236}">
-                <a16:creationId xmlns:a16="http://schemas.microsoft.com/office/drawing/2014/main" id="{38424A30-9B44-4C50-8974-F269A009198A}"/>
+                <a16:creationId xmlns:a16="http://schemas.microsoft.com/office/drawing/2014/main" id="{5C7039A3-9042-4AE2-95AC-6D34FA7157F9}"/>
               </a:ext>
             </a:extLst>
           </p:cNvPr>
@@ -13616,7 +13616,7 @@
           <p:cNvPr id="15" name="">
             <a:extLst xmlns:a="http://schemas.openxmlformats.org/drawingml/2006/main">
               <a:ext uri="{FF2B5EF4-FFF2-40B4-BE49-F238E27FC236}">
-                <a16:creationId xmlns:a16="http://schemas.microsoft.com/office/drawing/2014/main" id="{B348CE93-7AA7-4D4B-B0B7-87752607A371}"/>
+                <a16:creationId xmlns:a16="http://schemas.microsoft.com/office/drawing/2014/main" id="{B8FBC623-3FDF-4959-9DDD-3371B17EA353}"/>
               </a:ext>
             </a:extLst>
           </p:cNvPr>
@@ -13651,7 +13651,7 @@
           <p:cNvPr id="16" name="">
             <a:extLst xmlns:a="http://schemas.openxmlformats.org/drawingml/2006/main">
               <a:ext uri="{FF2B5EF4-FFF2-40B4-BE49-F238E27FC236}">
-                <a16:creationId xmlns:a16="http://schemas.microsoft.com/office/drawing/2014/main" id="{FB7A8E62-A28E-4DE9-B4EB-53D0A6275378}"/>
+                <a16:creationId xmlns:a16="http://schemas.microsoft.com/office/drawing/2014/main" id="{B91C7945-5873-4C32-9DF4-80B0DB5B2EFB}"/>
               </a:ext>
             </a:extLst>
           </p:cNvPr>
@@ -13709,7 +13709,7 @@
           <p:cNvPr id="17" name="">
             <a:extLst xmlns:a="http://schemas.openxmlformats.org/drawingml/2006/main">
               <a:ext uri="{FF2B5EF4-FFF2-40B4-BE49-F238E27FC236}">
-                <a16:creationId xmlns:a16="http://schemas.microsoft.com/office/drawing/2014/main" id="{53A1CDE6-6F75-4EC8-86C8-D357A7942C76}"/>
+                <a16:creationId xmlns:a16="http://schemas.microsoft.com/office/drawing/2014/main" id="{DEA420ED-385E-439D-858B-26EFD5A0F89C}"/>
               </a:ext>
             </a:extLst>
           </p:cNvPr>
@@ -13801,7 +13801,7 @@
           <p:cNvPr id="18" name="">
             <a:extLst xmlns:a="http://schemas.openxmlformats.org/drawingml/2006/main">
               <a:ext uri="{FF2B5EF4-FFF2-40B4-BE49-F238E27FC236}">
-                <a16:creationId xmlns:a16="http://schemas.microsoft.com/office/drawing/2014/main" id="{F3FBAD60-DAD2-4E6C-B1CB-0DE2BDE56347}"/>
+                <a16:creationId xmlns:a16="http://schemas.microsoft.com/office/drawing/2014/main" id="{9698DAAE-0B1D-4CE3-9A3A-05CECB0F26D4}"/>
               </a:ext>
             </a:extLst>
           </p:cNvPr>
@@ -13834,7 +13834,7 @@
           <p:cNvPr id="19" name="">
             <a:extLst xmlns:a="http://schemas.openxmlformats.org/drawingml/2006/main">
               <a:ext uri="{FF2B5EF4-FFF2-40B4-BE49-F238E27FC236}">
-                <a16:creationId xmlns:a16="http://schemas.microsoft.com/office/drawing/2014/main" id="{E77EB2C9-CE60-4F2F-8A26-4BF29380FD20}"/>
+                <a16:creationId xmlns:a16="http://schemas.microsoft.com/office/drawing/2014/main" id="{81271904-1FD8-4905-9889-6393E3CEFEFE}"/>
               </a:ext>
             </a:extLst>
           </p:cNvPr>
@@ -13869,7 +13869,7 @@
           <p:cNvPr id="20" name="">
             <a:extLst xmlns:a="http://schemas.openxmlformats.org/drawingml/2006/main">
               <a:ext uri="{FF2B5EF4-FFF2-40B4-BE49-F238E27FC236}">
-                <a16:creationId xmlns:a16="http://schemas.microsoft.com/office/drawing/2014/main" id="{E934CE7E-4970-440C-8E8A-995B6D4A250D}"/>
+                <a16:creationId xmlns:a16="http://schemas.microsoft.com/office/drawing/2014/main" id="{0E17267B-6702-4189-97BF-524107F773AE}"/>
               </a:ext>
             </a:extLst>
           </p:cNvPr>
@@ -13927,7 +13927,7 @@
           <p:cNvPr id="21" name="">
             <a:extLst xmlns:a="http://schemas.openxmlformats.org/drawingml/2006/main">
               <a:ext uri="{FF2B5EF4-FFF2-40B4-BE49-F238E27FC236}">
-                <a16:creationId xmlns:a16="http://schemas.microsoft.com/office/drawing/2014/main" id="{4234586E-2BDA-4D53-B00D-F3AABC6DB001}"/>
+                <a16:creationId xmlns:a16="http://schemas.microsoft.com/office/drawing/2014/main" id="{58017695-B2B5-4E1E-8B95-CEFE89B3D062}"/>
               </a:ext>
             </a:extLst>
           </p:cNvPr>
@@ -14017,7 +14017,7 @@
     </p:spTree>
     <p:extLst>
       <p:ext uri="{BB962C8B-B14F-4D97-AF65-F5344CB8AC3E}">
-        <p14:creationId xmlns:p14="http://schemas.microsoft.com/office/powerpoint/2010/main" val="1459480570"/>
+        <p14:creationId xmlns:p14="http://schemas.microsoft.com/office/powerpoint/2010/main" val="293322188"/>
       </p:ext>
     </p:extLst>
   </p:cSld>
@@ -14030,7 +14030,7 @@
     <p:bg>
       <p:bgPr>
         <a:solidFill xmlns:a="http://schemas.openxmlformats.org/drawingml/2006/main">
-          <a:srgbClr val="0E1B3E"/>
+          <a:srgbClr val="070F26"/>
         </a:solidFill>
       </p:bgPr>
     </p:bg>
@@ -14048,7 +14048,7 @@
           <p:cNvPr id="1" name="">
             <a:extLst xmlns:a="http://schemas.openxmlformats.org/drawingml/2006/main">
               <a:ext uri="{FF2B5EF4-FFF2-40B4-BE49-F238E27FC236}">
-                <a16:creationId xmlns:a16="http://schemas.microsoft.com/office/drawing/2014/main" id="{AB27A9BC-300B-4EC6-A5BF-F1A89C49D3C8}"/>
+                <a16:creationId xmlns:a16="http://schemas.microsoft.com/office/drawing/2014/main" id="{603048A2-0731-4CA2-91C3-7B27995E22C7}"/>
               </a:ext>
             </a:extLst>
           </p:cNvPr>
@@ -14066,7 +14066,7 @@
             <a:avLst/>
           </a:prstGeom>
           <a:solidFill xmlns:a="http://schemas.openxmlformats.org/drawingml/2006/main">
-            <a:srgbClr val="0E1B3E"/>
+            <a:srgbClr val="070F26"/>
           </a:solidFill>
           <a:ln xmlns:a="http://schemas.openxmlformats.org/drawingml/2006/main" w="0">
             <a:solidFill>
@@ -14087,7 +14087,7 @@
           <p:nvPr/>
         </p:nvPicPr>
         <p:blipFill>
-          <a:blip xmlns:r="http://schemas.openxmlformats.org/officeDocument/2006/relationships" xmlns:a="http://schemas.openxmlformats.org/drawingml/2006/main" r:embed="Raa171f304c2c46ba"/>
+          <a:blip xmlns:r="http://schemas.openxmlformats.org/officeDocument/2006/relationships" xmlns:a="http://schemas.openxmlformats.org/drawingml/2006/main" r:embed="R7566e03f8145439a"/>
           <a:stretch xmlns:a="http://schemas.openxmlformats.org/drawingml/2006/main"/>
         </p:blipFill>
         <p:spPr>
@@ -14105,7 +14105,7 @@
           <p:cNvPr id="3" name="">
             <a:extLst xmlns:a="http://schemas.openxmlformats.org/drawingml/2006/main">
               <a:ext uri="{FF2B5EF4-FFF2-40B4-BE49-F238E27FC236}">
-                <a16:creationId xmlns:a16="http://schemas.microsoft.com/office/drawing/2014/main" id="{10BBBC3B-E3C1-46C8-B032-5640CB4B8A12}"/>
+                <a16:creationId xmlns:a16="http://schemas.microsoft.com/office/drawing/2014/main" id="{0EC878C3-5A28-4E73-94FF-D2A361FA87DD}"/>
               </a:ext>
             </a:extLst>
           </p:cNvPr>
@@ -14163,7 +14163,7 @@
           <p:cNvPr id="4" name="">
             <a:extLst xmlns:a="http://schemas.openxmlformats.org/drawingml/2006/main">
               <a:ext uri="{FF2B5EF4-FFF2-40B4-BE49-F238E27FC236}">
-                <a16:creationId xmlns:a16="http://schemas.microsoft.com/office/drawing/2014/main" id="{4862145F-65F0-4CF6-8489-694D9ED280B8}"/>
+                <a16:creationId xmlns:a16="http://schemas.microsoft.com/office/drawing/2014/main" id="{44790BD5-CC99-4A92-B9D0-121BB3D018F4}"/>
               </a:ext>
             </a:extLst>
           </p:cNvPr>
@@ -14221,7 +14221,7 @@
           <p:cNvPr id="5" name="">
             <a:extLst xmlns:a="http://schemas.openxmlformats.org/drawingml/2006/main">
               <a:ext uri="{FF2B5EF4-FFF2-40B4-BE49-F238E27FC236}">
-                <a16:creationId xmlns:a16="http://schemas.microsoft.com/office/drawing/2014/main" id="{F7922D62-B9AC-4497-BF6E-368D68D1CD24}"/>
+                <a16:creationId xmlns:a16="http://schemas.microsoft.com/office/drawing/2014/main" id="{490B8AC6-9EA2-4A18-BAF1-9BFAA73E4629}"/>
               </a:ext>
             </a:extLst>
           </p:cNvPr>
@@ -14279,7 +14279,7 @@
           <p:cNvPr id="6" name="">
             <a:extLst xmlns:a="http://schemas.openxmlformats.org/drawingml/2006/main">
               <a:ext uri="{FF2B5EF4-FFF2-40B4-BE49-F238E27FC236}">
-                <a16:creationId xmlns:a16="http://schemas.microsoft.com/office/drawing/2014/main" id="{814AE476-9E7B-4492-8D5E-9A0088BC0290}"/>
+                <a16:creationId xmlns:a16="http://schemas.microsoft.com/office/drawing/2014/main" id="{568D56BA-9926-46CA-9C8E-4776330C81FF}"/>
               </a:ext>
             </a:extLst>
           </p:cNvPr>
@@ -14341,13 +14341,13 @@
           <p:nvPr/>
         </p:nvPicPr>
         <p:blipFill>
-          <a:blip xmlns:r="http://schemas.openxmlformats.org/officeDocument/2006/relationships" xmlns:a="http://schemas.openxmlformats.org/drawingml/2006/main" r:embed="Re3a4e830cde44b5e"/>
+          <a:blip xmlns:r="http://schemas.openxmlformats.org/officeDocument/2006/relationships" xmlns:a="http://schemas.openxmlformats.org/drawingml/2006/main" r:embed="R5337ee1dbdb84fe8"/>
           <a:stretch xmlns:a="http://schemas.openxmlformats.org/drawingml/2006/main"/>
         </p:blipFill>
         <p:spPr>
           <a:xfrm xmlns:a="http://schemas.openxmlformats.org/drawingml/2006/main">
-            <a:off x="476250" y="1257300"/>
-            <a:ext cx="2667000" cy="4533900"/>
+            <a:off x="0" y="1746250"/>
+            <a:ext cx="2667000" cy="3556000"/>
           </a:xfrm>
           <a:prstGeom xmlns:a="http://schemas.openxmlformats.org/drawingml/2006/main" prst="rect">
             <a:avLst/>
@@ -14359,7 +14359,7 @@
           <p:cNvPr id="8" name="">
             <a:extLst xmlns:a="http://schemas.openxmlformats.org/drawingml/2006/main">
               <a:ext uri="{FF2B5EF4-FFF2-40B4-BE49-F238E27FC236}">
-                <a16:creationId xmlns:a16="http://schemas.microsoft.com/office/drawing/2014/main" id="{A93508B4-C8E9-43D2-8BBB-7ED4910E55DC}"/>
+                <a16:creationId xmlns:a16="http://schemas.microsoft.com/office/drawing/2014/main" id="{1052B241-6BB0-42F3-94F4-88737D0900F3}"/>
               </a:ext>
             </a:extLst>
           </p:cNvPr>
@@ -14417,7 +14417,7 @@
           <p:cNvPr id="9" name="">
             <a:extLst xmlns:a="http://schemas.openxmlformats.org/drawingml/2006/main">
               <a:ext uri="{FF2B5EF4-FFF2-40B4-BE49-F238E27FC236}">
-                <a16:creationId xmlns:a16="http://schemas.microsoft.com/office/drawing/2014/main" id="{688F2820-9467-4E65-9A55-DC7DF93AF2B2}"/>
+                <a16:creationId xmlns:a16="http://schemas.microsoft.com/office/drawing/2014/main" id="{0FBFE07C-152B-455C-84D8-250E6EDF6203}"/>
               </a:ext>
             </a:extLst>
           </p:cNvPr>
@@ -14475,7 +14475,7 @@
           <p:cNvPr id="10" name="">
             <a:extLst xmlns:a="http://schemas.openxmlformats.org/drawingml/2006/main">
               <a:ext uri="{FF2B5EF4-FFF2-40B4-BE49-F238E27FC236}">
-                <a16:creationId xmlns:a16="http://schemas.microsoft.com/office/drawing/2014/main" id="{89A9DF22-74E4-4AB5-B101-910910EB680B}"/>
+                <a16:creationId xmlns:a16="http://schemas.microsoft.com/office/drawing/2014/main" id="{71832C07-97B6-4365-A95D-0677605DB442}"/>
               </a:ext>
             </a:extLst>
           </p:cNvPr>
@@ -14531,7 +14531,7 @@
     </p:spTree>
     <p:extLst>
       <p:ext uri="{BB962C8B-B14F-4D97-AF65-F5344CB8AC3E}">
-        <p14:creationId xmlns:p14="http://schemas.microsoft.com/office/powerpoint/2010/main" val="832955226"/>
+        <p14:creationId xmlns:p14="http://schemas.microsoft.com/office/powerpoint/2010/main" val="1327009175"/>
       </p:ext>
     </p:extLst>
   </p:cSld>
@@ -14562,7 +14562,7 @@
           <p:cNvPr id="1" name="">
             <a:extLst xmlns:a="http://schemas.openxmlformats.org/drawingml/2006/main">
               <a:ext uri="{FF2B5EF4-FFF2-40B4-BE49-F238E27FC236}">
-                <a16:creationId xmlns:a16="http://schemas.microsoft.com/office/drawing/2014/main" id="{605FD775-B5D6-4069-8E83-51C4DEFFD74B}"/>
+                <a16:creationId xmlns:a16="http://schemas.microsoft.com/office/drawing/2014/main" id="{D6457EF5-3959-4ECE-B621-EC50C78521C9}"/>
               </a:ext>
             </a:extLst>
           </p:cNvPr>
@@ -14601,7 +14601,7 @@
           <p:nvPr/>
         </p:nvPicPr>
         <p:blipFill>
-          <a:blip xmlns:r="http://schemas.openxmlformats.org/officeDocument/2006/relationships" xmlns:a="http://schemas.openxmlformats.org/drawingml/2006/main" r:embed="R22d3ab08e9694756"/>
+          <a:blip xmlns:r="http://schemas.openxmlformats.org/officeDocument/2006/relationships" xmlns:a="http://schemas.openxmlformats.org/drawingml/2006/main" r:embed="Rb59f9a7c8a4f459a"/>
           <a:stretch xmlns:a="http://schemas.openxmlformats.org/drawingml/2006/main"/>
         </p:blipFill>
         <p:spPr>
@@ -14619,7 +14619,7 @@
           <p:cNvPr id="3" name="">
             <a:extLst xmlns:a="http://schemas.openxmlformats.org/drawingml/2006/main">
               <a:ext uri="{FF2B5EF4-FFF2-40B4-BE49-F238E27FC236}">
-                <a16:creationId xmlns:a16="http://schemas.microsoft.com/office/drawing/2014/main" id="{7D0736BB-95E0-4DCB-A1A7-A26CE4F2A830}"/>
+                <a16:creationId xmlns:a16="http://schemas.microsoft.com/office/drawing/2014/main" id="{1D1065D0-5BEE-4F08-BB01-38319599B294}"/>
               </a:ext>
             </a:extLst>
           </p:cNvPr>
@@ -14657,14 +14657,14 @@
             <a:pPr algn="r">
               <a:defRPr sz="825" b="1">
                 <a:solidFill>
-                  <a:srgbClr val="0E1B3E"/>
+                  <a:srgbClr val="070F26"/>
                 </a:solidFill>
               </a:defRPr>
             </a:pPr>
             <a:r>
               <a:rPr sz="825" b="1">
                 <a:solidFill>
-                  <a:srgbClr val="0E1B3E"/>
+                  <a:srgbClr val="070F26"/>
                 </a:solidFill>
               </a:rPr>
               <a:t>NTT DATA UNIVERSITY</a:t>
@@ -14677,7 +14677,7 @@
           <p:cNvPr id="4" name="">
             <a:extLst xmlns:a="http://schemas.openxmlformats.org/drawingml/2006/main">
               <a:ext uri="{FF2B5EF4-FFF2-40B4-BE49-F238E27FC236}">
-                <a16:creationId xmlns:a16="http://schemas.microsoft.com/office/drawing/2014/main" id="{F6BCB79A-449A-481E-A200-E9633620E2D4}"/>
+                <a16:creationId xmlns:a16="http://schemas.microsoft.com/office/drawing/2014/main" id="{79F30C37-BCA6-43A9-9F0E-CDDD97C37C24}"/>
               </a:ext>
             </a:extLst>
           </p:cNvPr>
@@ -14735,7 +14735,7 @@
           <p:cNvPr id="5" name="">
             <a:extLst xmlns:a="http://schemas.openxmlformats.org/drawingml/2006/main">
               <a:ext uri="{FF2B5EF4-FFF2-40B4-BE49-F238E27FC236}">
-                <a16:creationId xmlns:a16="http://schemas.microsoft.com/office/drawing/2014/main" id="{BEF56D2F-751D-483B-B19F-59A3CB066161}"/>
+                <a16:creationId xmlns:a16="http://schemas.microsoft.com/office/drawing/2014/main" id="{6C226D62-BA3C-43D3-B6F7-39E9A93A0E09}"/>
               </a:ext>
             </a:extLst>
           </p:cNvPr>
@@ -14793,7 +14793,7 @@
           <p:cNvPr id="6" name="">
             <a:extLst xmlns:a="http://schemas.openxmlformats.org/drawingml/2006/main">
               <a:ext uri="{FF2B5EF4-FFF2-40B4-BE49-F238E27FC236}">
-                <a16:creationId xmlns:a16="http://schemas.microsoft.com/office/drawing/2014/main" id="{5BFCEEA0-8910-456D-9D9F-E341EF0ED67D}"/>
+                <a16:creationId xmlns:a16="http://schemas.microsoft.com/office/drawing/2014/main" id="{7F9F95B5-1828-4917-BB4D-348C42039DAF}"/>
               </a:ext>
             </a:extLst>
           </p:cNvPr>
@@ -14831,14 +14831,14 @@
             <a:pPr algn="r">
               <a:defRPr sz="675" b="1">
                 <a:solidFill>
-                  <a:srgbClr val="0E1B3E"/>
+                  <a:srgbClr val="070F26"/>
                 </a:solidFill>
               </a:defRPr>
             </a:pPr>
             <a:r>
               <a:rPr sz="675" b="1">
                 <a:solidFill>
-                  <a:srgbClr val="0E1B3E"/>
+                  <a:srgbClr val="070F26"/>
                 </a:solidFill>
               </a:rPr>
               <a:t>NTT DATA UNIVERSITY</a:t>
@@ -14851,7 +14851,7 @@
           <p:cNvPr id="7" name="">
             <a:extLst xmlns:a="http://schemas.openxmlformats.org/drawingml/2006/main">
               <a:ext uri="{FF2B5EF4-FFF2-40B4-BE49-F238E27FC236}">
-                <a16:creationId xmlns:a16="http://schemas.microsoft.com/office/drawing/2014/main" id="{8CEF92B9-99DD-4D31-8220-4E2F4B5D0FF3}"/>
+                <a16:creationId xmlns:a16="http://schemas.microsoft.com/office/drawing/2014/main" id="{0BC1CB14-C7BF-4857-AD19-9B9437318C7C}"/>
               </a:ext>
             </a:extLst>
           </p:cNvPr>
@@ -14909,7 +14909,7 @@
           <p:cNvPr id="8" name="">
             <a:extLst xmlns:a="http://schemas.openxmlformats.org/drawingml/2006/main">
               <a:ext uri="{FF2B5EF4-FFF2-40B4-BE49-F238E27FC236}">
-                <a16:creationId xmlns:a16="http://schemas.microsoft.com/office/drawing/2014/main" id="{825DF773-5549-4299-B387-48DB47FC5B9C}"/>
+                <a16:creationId xmlns:a16="http://schemas.microsoft.com/office/drawing/2014/main" id="{0FE9AA9F-D83E-49A8-81B6-0A3EC0F6ED8A}"/>
               </a:ext>
             </a:extLst>
           </p:cNvPr>
@@ -14947,14 +14947,14 @@
             <a:pPr algn="l">
               <a:defRPr sz="2400" b="0">
                 <a:solidFill>
-                  <a:srgbClr val="0E1B3E"/>
+                  <a:srgbClr val="070F26"/>
                 </a:solidFill>
               </a:defRPr>
             </a:pPr>
             <a:r>
               <a:rPr sz="2400" b="0">
                 <a:solidFill>
-                  <a:srgbClr val="0E1B3E"/>
+                  <a:srgbClr val="070F26"/>
                 </a:solidFill>
               </a:rPr>
               <a:t>Escrever os testes primeiro — todos falhando</a:t>
@@ -14967,7 +14967,7 @@
           <p:cNvPr id="9" name="">
             <a:extLst xmlns:a="http://schemas.openxmlformats.org/drawingml/2006/main">
               <a:ext uri="{FF2B5EF4-FFF2-40B4-BE49-F238E27FC236}">
-                <a16:creationId xmlns:a16="http://schemas.microsoft.com/office/drawing/2014/main" id="{13A84E0D-6EB7-45F7-8529-68A6618BBAD3}"/>
+                <a16:creationId xmlns:a16="http://schemas.microsoft.com/office/drawing/2014/main" id="{CD242308-064C-4B66-BC7E-754680F0706B}"/>
               </a:ext>
             </a:extLst>
           </p:cNvPr>
@@ -15025,7 +15025,7 @@
           <p:cNvPr id="10" name="">
             <a:extLst xmlns:a="http://schemas.openxmlformats.org/drawingml/2006/main">
               <a:ext uri="{FF2B5EF4-FFF2-40B4-BE49-F238E27FC236}">
-                <a16:creationId xmlns:a16="http://schemas.microsoft.com/office/drawing/2014/main" id="{A50E4C1E-73CB-4822-B488-4CC6B21711DB}"/>
+                <a16:creationId xmlns:a16="http://schemas.microsoft.com/office/drawing/2014/main" id="{60D95B4D-2900-45B0-AA35-7CE7F776FF3C}"/>
               </a:ext>
             </a:extLst>
           </p:cNvPr>
@@ -15058,7 +15058,7 @@
           <p:cNvPr id="11" name="">
             <a:extLst xmlns:a="http://schemas.openxmlformats.org/drawingml/2006/main">
               <a:ext uri="{FF2B5EF4-FFF2-40B4-BE49-F238E27FC236}">
-                <a16:creationId xmlns:a16="http://schemas.microsoft.com/office/drawing/2014/main" id="{45A6361F-07AC-4D46-BCAA-6762DA9D8659}"/>
+                <a16:creationId xmlns:a16="http://schemas.microsoft.com/office/drawing/2014/main" id="{D2FFA8B8-0F0F-434C-AD7B-F040AA36E10E}"/>
               </a:ext>
             </a:extLst>
           </p:cNvPr>
@@ -15093,7 +15093,7 @@
           <p:cNvPr id="12" name="">
             <a:extLst xmlns:a="http://schemas.openxmlformats.org/drawingml/2006/main">
               <a:ext uri="{FF2B5EF4-FFF2-40B4-BE49-F238E27FC236}">
-                <a16:creationId xmlns:a16="http://schemas.microsoft.com/office/drawing/2014/main" id="{C238AC46-900D-4049-BFA6-9DD1FA2DD12A}"/>
+                <a16:creationId xmlns:a16="http://schemas.microsoft.com/office/drawing/2014/main" id="{804AA057-53C8-4D73-99E8-C4FB0D987E59}"/>
               </a:ext>
             </a:extLst>
           </p:cNvPr>
@@ -15151,7 +15151,7 @@
           <p:cNvPr id="13" name="">
             <a:extLst xmlns:a="http://schemas.openxmlformats.org/drawingml/2006/main">
               <a:ext uri="{FF2B5EF4-FFF2-40B4-BE49-F238E27FC236}">
-                <a16:creationId xmlns:a16="http://schemas.microsoft.com/office/drawing/2014/main" id="{38F4627A-54A3-4EA1-8B76-7314F63ABD6D}"/>
+                <a16:creationId xmlns:a16="http://schemas.microsoft.com/office/drawing/2014/main" id="{8F7F4F6F-688C-48E7-9A6D-A89EBD6378F1}"/>
               </a:ext>
             </a:extLst>
           </p:cNvPr>
@@ -15496,7 +15496,7 @@
           <p:cNvPr id="14" name="">
             <a:extLst xmlns:a="http://schemas.openxmlformats.org/drawingml/2006/main">
               <a:ext uri="{FF2B5EF4-FFF2-40B4-BE49-F238E27FC236}">
-                <a16:creationId xmlns:a16="http://schemas.microsoft.com/office/drawing/2014/main" id="{344A3DE8-7DF9-46DA-9587-3CD4F21510E0}"/>
+                <a16:creationId xmlns:a16="http://schemas.microsoft.com/office/drawing/2014/main" id="{EE9DD7EE-572B-49B1-90CF-82DCBBC5E775}"/>
               </a:ext>
             </a:extLst>
           </p:cNvPr>
@@ -15529,7 +15529,7 @@
           <p:cNvPr id="15" name="">
             <a:extLst xmlns:a="http://schemas.openxmlformats.org/drawingml/2006/main">
               <a:ext uri="{FF2B5EF4-FFF2-40B4-BE49-F238E27FC236}">
-                <a16:creationId xmlns:a16="http://schemas.microsoft.com/office/drawing/2014/main" id="{215F7792-2F82-46C4-B213-ECC981E1A176}"/>
+                <a16:creationId xmlns:a16="http://schemas.microsoft.com/office/drawing/2014/main" id="{F95B1F11-A07A-4508-9456-12A230767BD2}"/>
               </a:ext>
             </a:extLst>
           </p:cNvPr>
@@ -15564,7 +15564,7 @@
           <p:cNvPr id="16" name="">
             <a:extLst xmlns:a="http://schemas.openxmlformats.org/drawingml/2006/main">
               <a:ext uri="{FF2B5EF4-FFF2-40B4-BE49-F238E27FC236}">
-                <a16:creationId xmlns:a16="http://schemas.microsoft.com/office/drawing/2014/main" id="{8A69144F-35B7-4BE4-B40C-806AF27816A2}"/>
+                <a16:creationId xmlns:a16="http://schemas.microsoft.com/office/drawing/2014/main" id="{A1DEB64B-2FB8-40F3-8337-D5D7BF82EE36}"/>
               </a:ext>
             </a:extLst>
           </p:cNvPr>
@@ -15622,7 +15622,7 @@
           <p:cNvPr id="17" name="">
             <a:extLst xmlns:a="http://schemas.openxmlformats.org/drawingml/2006/main">
               <a:ext uri="{FF2B5EF4-FFF2-40B4-BE49-F238E27FC236}">
-                <a16:creationId xmlns:a16="http://schemas.microsoft.com/office/drawing/2014/main" id="{1C63AAB0-1D02-4374-922A-B34FD30EC5A9}"/>
+                <a16:creationId xmlns:a16="http://schemas.microsoft.com/office/drawing/2014/main" id="{C226A981-73D4-485A-A185-0A9555B6521A}"/>
               </a:ext>
             </a:extLst>
           </p:cNvPr>
@@ -15856,7 +15856,7 @@
     </p:spTree>
     <p:extLst>
       <p:ext uri="{BB962C8B-B14F-4D97-AF65-F5344CB8AC3E}">
-        <p14:creationId xmlns:p14="http://schemas.microsoft.com/office/powerpoint/2010/main" val="1695322115"/>
+        <p14:creationId xmlns:p14="http://schemas.microsoft.com/office/powerpoint/2010/main" val="1683722611"/>
       </p:ext>
     </p:extLst>
   </p:cSld>
